--- a/docs/AI_Log_Analytics_Platform_HCLTech.pptx
+++ b/docs/AI_Log_Analytics_Platform_HCLTech.pptx
@@ -3095,12 +3095,20 @@
         <p:nvPr/>
       </p:nvGrpSpPr>
       <p:grpSpPr/>
-      <p:sp>
-        <p:nvSpPr>
-          <p:cNvPr id="2" name="Rectangle 1"/>
-          <p:cNvSpPr/>
+      <p:pic>
+        <p:nvPicPr>
+          <p:cNvPr id="2" name="Picture 1" descr="image1.png"/>
+          <p:cNvPicPr>
+            <a:picLocks noChangeAspect="1"/>
+          </p:cNvPicPr>
           <p:nvPr/>
-        </p:nvSpPr>
+        </p:nvPicPr>
+        <p:blipFill>
+          <a:blip r:embed="rId2"/>
+          <a:stretch>
+            <a:fillRect/>
+          </a:stretch>
+        </p:blipFill>
         <p:spPr>
           <a:xfrm>
             <a:off x="0" y="0"/>
@@ -3109,131 +3117,18 @@
           <a:prstGeom prst="rect">
             <a:avLst/>
           </a:prstGeom>
-          <a:solidFill>
-            <a:srgbClr val="0D1B4B"/>
-          </a:solidFill>
-          <a:ln>
-            <a:noFill/>
-          </a:ln>
         </p:spPr>
-        <p:style>
-          <a:lnRef idx="1">
-            <a:schemeClr val="accent1"/>
-          </a:lnRef>
-          <a:fillRef idx="3">
-            <a:schemeClr val="accent1"/>
-          </a:fillRef>
-          <a:effectRef idx="2">
-            <a:schemeClr val="accent1"/>
-          </a:effectRef>
-          <a:fontRef idx="minor">
-            <a:schemeClr val="lt1"/>
-          </a:fontRef>
-        </p:style>
-        <p:txBody>
-          <a:bodyPr rtlCol="0" anchor="ctr"/>
-          <a:lstStyle/>
-          <a:p>
-            <a:pPr algn="ctr"/>
-          </a:p>
-        </p:txBody>
-      </p:sp>
-      <p:sp>
-        <p:nvSpPr>
-          <p:cNvPr id="3" name="Rectangle 2"/>
-          <p:cNvSpPr/>
+      </p:pic>
+      <p:sp>
+        <p:nvSpPr>
+          <p:cNvPr id="3" name="TextBox 2"/>
+          <p:cNvSpPr txBox="1"/>
           <p:nvPr/>
         </p:nvSpPr>
         <p:spPr>
           <a:xfrm>
-            <a:off x="7799832" y="0"/>
-            <a:ext cx="4389120" cy="6858000"/>
-          </a:xfrm>
-          <a:prstGeom prst="rect">
-            <a:avLst/>
-          </a:prstGeom>
-          <a:solidFill>
-            <a:srgbClr val="1A0A5E"/>
-          </a:solidFill>
-          <a:ln>
-            <a:noFill/>
-          </a:ln>
-        </p:spPr>
-        <p:style>
-          <a:lnRef idx="1">
-            <a:schemeClr val="accent1"/>
-          </a:lnRef>
-          <a:fillRef idx="3">
-            <a:schemeClr val="accent1"/>
-          </a:fillRef>
-          <a:effectRef idx="2">
-            <a:schemeClr val="accent1"/>
-          </a:effectRef>
-          <a:fontRef idx="minor">
-            <a:schemeClr val="lt1"/>
-          </a:fontRef>
-        </p:style>
-        <p:txBody>
-          <a:bodyPr rtlCol="0" anchor="ctr"/>
-          <a:lstStyle/>
-          <a:p>
-            <a:pPr algn="ctr"/>
-          </a:p>
-        </p:txBody>
-      </p:sp>
-      <p:sp>
-        <p:nvSpPr>
-          <p:cNvPr id="4" name="Rectangle 3"/>
-          <p:cNvSpPr/>
-          <p:nvPr/>
-        </p:nvSpPr>
-        <p:spPr>
-          <a:xfrm>
-            <a:off x="7159752" y="0"/>
-            <a:ext cx="1097280" cy="6858000"/>
-          </a:xfrm>
-          <a:prstGeom prst="rect">
-            <a:avLst/>
-          </a:prstGeom>
-          <a:solidFill>
-            <a:srgbClr val="7B2FBE"/>
-          </a:solidFill>
-          <a:ln>
-            <a:noFill/>
-          </a:ln>
-        </p:spPr>
-        <p:style>
-          <a:lnRef idx="1">
-            <a:schemeClr val="accent1"/>
-          </a:lnRef>
-          <a:fillRef idx="3">
-            <a:schemeClr val="accent1"/>
-          </a:fillRef>
-          <a:effectRef idx="2">
-            <a:schemeClr val="accent1"/>
-          </a:effectRef>
-          <a:fontRef idx="minor">
-            <a:schemeClr val="lt1"/>
-          </a:fontRef>
-        </p:style>
-        <p:txBody>
-          <a:bodyPr rtlCol="0" anchor="ctr"/>
-          <a:lstStyle/>
-          <a:p>
-            <a:pPr algn="ctr"/>
-          </a:p>
-        </p:txBody>
-      </p:sp>
-      <p:sp>
-        <p:nvSpPr>
-          <p:cNvPr id="5" name="TextBox 4"/>
-          <p:cNvSpPr txBox="1"/>
-          <p:nvPr/>
-        </p:nvSpPr>
-        <p:spPr>
-          <a:xfrm>
-            <a:off x="365760" y="320040"/>
-            <a:ext cx="2286000" cy="457200"/>
+            <a:off x="384048" y="1234440"/>
+            <a:ext cx="7132320" cy="411480"/>
           </a:xfrm>
           <a:prstGeom prst="rect">
             <a:avLst/>
@@ -3248,26 +3143,26 @@
           <a:p>
             <a:pPr algn="l"/>
             <a:r>
-              <a:rPr sz="2200" b="1" i="0">
-                <a:solidFill>
-                  <a:srgbClr val="FFFFFF"/>
-                </a:solidFill>
-              </a:rPr>
-              <a:t>HCLTech</a:t>
-            </a:r>
-          </a:p>
-        </p:txBody>
-      </p:sp>
-      <p:sp>
-        <p:nvSpPr>
-          <p:cNvPr id="6" name="TextBox 5"/>
+              <a:rPr sz="1200" b="0" i="0">
+                <a:solidFill>
+                  <a:srgbClr val="CCCCFF"/>
+                </a:solidFill>
+              </a:rPr>
+              <a:t>AI Log Analytics Platform for Banking</a:t>
+            </a:r>
+          </a:p>
+        </p:txBody>
+      </p:sp>
+      <p:sp>
+        <p:nvSpPr>
+          <p:cNvPr id="4" name="TextBox 3"/>
           <p:cNvSpPr txBox="1"/>
           <p:nvPr/>
         </p:nvSpPr>
         <p:spPr>
           <a:xfrm>
-            <a:off x="2286000" y="347472"/>
-            <a:ext cx="3200400" cy="411480"/>
+            <a:off x="384048" y="1645920"/>
+            <a:ext cx="7315200" cy="1463040"/>
           </a:xfrm>
           <a:prstGeom prst="rect">
             <a:avLst/>
@@ -3282,26 +3177,27 @@
           <a:p>
             <a:pPr algn="l"/>
             <a:r>
-              <a:rPr sz="1000" b="0" i="0">
+              <a:rPr sz="3000" b="1" i="0">
                 <a:solidFill>
                   <a:srgbClr val="FFFFFF"/>
                 </a:solidFill>
               </a:rPr>
-              <a:t>| Supercharging Progress™</a:t>
-            </a:r>
-          </a:p>
-        </p:txBody>
-      </p:sp>
-      <p:sp>
-        <p:nvSpPr>
-          <p:cNvPr id="7" name="TextBox 6"/>
+              <a:t>Banking AI Log Analytics Platform
+on Azure Synapse Analytics</a:t>
+            </a:r>
+          </a:p>
+        </p:txBody>
+      </p:sp>
+      <p:sp>
+        <p:nvSpPr>
+          <p:cNvPr id="5" name="TextBox 4"/>
           <p:cNvSpPr txBox="1"/>
           <p:nvPr/>
         </p:nvSpPr>
         <p:spPr>
           <a:xfrm>
-            <a:off x="365760" y="1280160"/>
-            <a:ext cx="7315200" cy="457200"/>
+            <a:off x="384048" y="3200400"/>
+            <a:ext cx="7132320" cy="777240"/>
           </a:xfrm>
           <a:prstGeom prst="rect">
             <a:avLst/>
@@ -3318,24 +3214,25 @@
             <a:r>
               <a:rPr sz="1300" b="0" i="0">
                 <a:solidFill>
-                  <a:srgbClr val="E8E0F5"/>
-                </a:solidFill>
-              </a:rPr>
-              <a:t>AI Log Analytics Platform</a:t>
-            </a:r>
-          </a:p>
-        </p:txBody>
-      </p:sp>
-      <p:sp>
-        <p:nvSpPr>
-          <p:cNvPr id="8" name="TextBox 7"/>
+                  <a:srgbClr val="CCCCFF"/>
+                </a:solidFill>
+              </a:rPr>
+              <a:t>Medallion Architecture  ·  Bronze / Silver / Gold
+AI-Powered Anomaly Detection &amp; Compliance Logging</a:t>
+            </a:r>
+          </a:p>
+        </p:txBody>
+      </p:sp>
+      <p:sp>
+        <p:nvSpPr>
+          <p:cNvPr id="6" name="TextBox 5"/>
           <p:cNvSpPr txBox="1"/>
           <p:nvPr/>
         </p:nvSpPr>
         <p:spPr>
           <a:xfrm>
-            <a:off x="365760" y="1737360"/>
-            <a:ext cx="7498079" cy="1371600"/>
+            <a:off x="384048" y="4160520"/>
+            <a:ext cx="5486400" cy="347472"/>
           </a:xfrm>
           <a:prstGeom prst="rect">
             <a:avLst/>
@@ -3350,95 +3247,25 @@
           <a:p>
             <a:pPr algn="l"/>
             <a:r>
-              <a:rPr sz="3000" b="1" i="0">
+              <a:rPr sz="1100" b="0" i="0">
                 <a:solidFill>
                   <a:srgbClr val="FFFFFF"/>
                 </a:solidFill>
               </a:rPr>
-              <a:t>Banking AI Log Analytics
-Platform on Azure Synapse</a:t>
-            </a:r>
-          </a:p>
-        </p:txBody>
-      </p:sp>
-      <p:sp>
-        <p:nvSpPr>
-          <p:cNvPr id="9" name="TextBox 8"/>
+              <a:t>By Mangeswara Sri Koundinya</a:t>
+            </a:r>
+          </a:p>
+        </p:txBody>
+      </p:sp>
+      <p:sp>
+        <p:nvSpPr>
+          <p:cNvPr id="7" name="TextBox 6"/>
           <p:cNvSpPr txBox="1"/>
           <p:nvPr/>
         </p:nvSpPr>
         <p:spPr>
           <a:xfrm>
-            <a:off x="365760" y="3246120"/>
-            <a:ext cx="7315200" cy="777240"/>
-          </a:xfrm>
-          <a:prstGeom prst="rect">
-            <a:avLst/>
-          </a:prstGeom>
-          <a:noFill/>
-        </p:spPr>
-        <p:txBody>
-          <a:bodyPr wrap="square">
-            <a:spAutoFit/>
-          </a:bodyPr>
-          <a:lstStyle/>
-          <a:p>
-            <a:pPr algn="l"/>
-            <a:r>
-              <a:rPr sz="1300" b="0" i="0">
-                <a:solidFill>
-                  <a:srgbClr val="CCCCFF"/>
-                </a:solidFill>
-              </a:rPr>
-              <a:t>Medallion Architecture · Bronze / Silver / Gold
-AI-Powered Anomaly Detection &amp; Compliance Logging</a:t>
-            </a:r>
-          </a:p>
-        </p:txBody>
-      </p:sp>
-      <p:sp>
-        <p:nvSpPr>
-          <p:cNvPr id="10" name="TextBox 9"/>
-          <p:cNvSpPr txBox="1"/>
-          <p:nvPr/>
-        </p:nvSpPr>
-        <p:spPr>
-          <a:xfrm>
-            <a:off x="365760" y="4206240"/>
-            <a:ext cx="5486400" cy="320040"/>
-          </a:xfrm>
-          <a:prstGeom prst="rect">
-            <a:avLst/>
-          </a:prstGeom>
-          <a:noFill/>
-        </p:spPr>
-        <p:txBody>
-          <a:bodyPr wrap="square">
-            <a:spAutoFit/>
-          </a:bodyPr>
-          <a:lstStyle/>
-          <a:p>
-            <a:pPr algn="l"/>
-            <a:r>
-              <a:rPr sz="1100" b="0" i="0">
-                <a:solidFill>
-                  <a:srgbClr val="FFFFFF"/>
-                </a:solidFill>
-              </a:rPr>
-              <a:t>By Mangeswara Sri Koundinya</a:t>
-            </a:r>
-          </a:p>
-        </p:txBody>
-      </p:sp>
-      <p:sp>
-        <p:nvSpPr>
-          <p:cNvPr id="11" name="TextBox 10"/>
-          <p:cNvSpPr txBox="1"/>
-          <p:nvPr/>
-        </p:nvSpPr>
-        <p:spPr>
-          <a:xfrm>
-            <a:off x="10177272" y="6355080"/>
+            <a:off x="10268712" y="6382512"/>
             <a:ext cx="1737360" cy="320040"/>
           </a:xfrm>
           <a:prstGeom prst="rect">
@@ -3482,16 +3309,40 @@
         <p:nvPr/>
       </p:nvGrpSpPr>
       <p:grpSpPr/>
-      <p:sp>
-        <p:nvSpPr>
-          <p:cNvPr id="2" name="TextBox 1"/>
+      <p:pic>
+        <p:nvPicPr>
+          <p:cNvPr id="2" name="Picture 1" descr="image2.png"/>
+          <p:cNvPicPr>
+            <a:picLocks noChangeAspect="1"/>
+          </p:cNvPicPr>
+          <p:nvPr/>
+        </p:nvPicPr>
+        <p:blipFill>
+          <a:blip r:embed="rId2"/>
+          <a:stretch>
+            <a:fillRect/>
+          </a:stretch>
+        </p:blipFill>
+        <p:spPr>
+          <a:xfrm>
+            <a:off x="0" y="0"/>
+            <a:ext cx="12188952" cy="6858000"/>
+          </a:xfrm>
+          <a:prstGeom prst="rect">
+            <a:avLst/>
+          </a:prstGeom>
+        </p:spPr>
+      </p:pic>
+      <p:sp>
+        <p:nvSpPr>
+          <p:cNvPr id="3" name="TextBox 2"/>
           <p:cNvSpPr txBox="1"/>
           <p:nvPr/>
         </p:nvSpPr>
         <p:spPr>
           <a:xfrm>
-            <a:off x="4389120" y="365760"/>
-            <a:ext cx="6400800" cy="685800"/>
+            <a:off x="4434840" y="347472"/>
+            <a:ext cx="6400800" cy="658368"/>
           </a:xfrm>
           <a:prstGeom prst="rect">
             <a:avLst/>
@@ -3506,56 +3357,13 @@
           <a:p>
             <a:pPr algn="l"/>
             <a:r>
-              <a:rPr sz="2800" b="1" i="0">
+              <a:rPr sz="2600" b="1" i="0">
                 <a:solidFill>
                   <a:srgbClr val="006BFF"/>
                 </a:solidFill>
               </a:rPr>
               <a:t>Agenda</a:t>
             </a:r>
-          </a:p>
-        </p:txBody>
-      </p:sp>
-      <p:sp>
-        <p:nvSpPr>
-          <p:cNvPr id="3" name="Rectangle 2"/>
-          <p:cNvSpPr/>
-          <p:nvPr/>
-        </p:nvSpPr>
-        <p:spPr>
-          <a:xfrm>
-            <a:off x="0" y="0"/>
-            <a:ext cx="4023360" cy="6858000"/>
-          </a:xfrm>
-          <a:prstGeom prst="rect">
-            <a:avLst/>
-          </a:prstGeom>
-          <a:solidFill>
-            <a:srgbClr val="D8E8FF"/>
-          </a:solidFill>
-          <a:ln>
-            <a:noFill/>
-          </a:ln>
-        </p:spPr>
-        <p:style>
-          <a:lnRef idx="1">
-            <a:schemeClr val="accent1"/>
-          </a:lnRef>
-          <a:fillRef idx="3">
-            <a:schemeClr val="accent1"/>
-          </a:fillRef>
-          <a:effectRef idx="2">
-            <a:schemeClr val="accent1"/>
-          </a:effectRef>
-          <a:fontRef idx="minor">
-            <a:schemeClr val="lt1"/>
-          </a:fontRef>
-        </p:style>
-        <p:txBody>
-          <a:bodyPr rtlCol="0" anchor="ctr"/>
-          <a:lstStyle/>
-          <a:p>
-            <a:pPr algn="ctr"/>
           </a:p>
         </p:txBody>
       </p:sp>
@@ -3567,8 +3375,8 @@
         </p:nvSpPr>
         <p:spPr>
           <a:xfrm>
-            <a:off x="274320" y="2560320"/>
-            <a:ext cx="3474720" cy="1828800"/>
+            <a:off x="4434840" y="1325880"/>
+            <a:ext cx="411480" cy="420624"/>
           </a:xfrm>
           <a:prstGeom prst="rect">
             <a:avLst/>
@@ -3581,116 +3389,28 @@
           </a:bodyPr>
           <a:lstStyle/>
           <a:p>
-            <a:pPr algn="ctr"/>
-            <a:r>
-              <a:rPr sz="2200" b="1" i="0">
+            <a:pPr algn="l"/>
+            <a:r>
+              <a:rPr sz="1300" b="0" i="0">
                 <a:solidFill>
                   <a:srgbClr val="006BFF"/>
                 </a:solidFill>
               </a:rPr>
-              <a:t>HCLTech
-AI Log
-Analytics</a:t>
-            </a:r>
-          </a:p>
-        </p:txBody>
-      </p:sp>
-      <p:sp>
-        <p:nvSpPr>
-          <p:cNvPr id="5" name="Rectangle 4"/>
-          <p:cNvSpPr/>
+              <a:t>1</a:t>
+            </a:r>
+          </a:p>
+        </p:txBody>
+      </p:sp>
+      <p:sp>
+        <p:nvSpPr>
+          <p:cNvPr id="5" name="TextBox 4"/>
+          <p:cNvSpPr txBox="1"/>
           <p:nvPr/>
         </p:nvSpPr>
         <p:spPr>
           <a:xfrm>
-            <a:off x="4297680" y="1188720"/>
-            <a:ext cx="7498079" cy="566928"/>
-          </a:xfrm>
-          <a:prstGeom prst="rect">
-            <a:avLst/>
-          </a:prstGeom>
-          <a:solidFill>
-            <a:srgbClr val="FFFFFF"/>
-          </a:solidFill>
-          <a:ln>
-            <a:noFill/>
-          </a:ln>
-        </p:spPr>
-        <p:style>
-          <a:lnRef idx="1">
-            <a:schemeClr val="accent1"/>
-          </a:lnRef>
-          <a:fillRef idx="3">
-            <a:schemeClr val="accent1"/>
-          </a:fillRef>
-          <a:effectRef idx="2">
-            <a:schemeClr val="accent1"/>
-          </a:effectRef>
-          <a:fontRef idx="minor">
-            <a:schemeClr val="lt1"/>
-          </a:fontRef>
-        </p:style>
-        <p:txBody>
-          <a:bodyPr rtlCol="0" anchor="ctr"/>
-          <a:lstStyle/>
-          <a:p>
-            <a:pPr algn="ctr"/>
-          </a:p>
-        </p:txBody>
-      </p:sp>
-      <p:sp>
-        <p:nvSpPr>
-          <p:cNvPr id="6" name="Rectangle 5"/>
-          <p:cNvSpPr/>
-          <p:nvPr/>
-        </p:nvSpPr>
-        <p:spPr>
-          <a:xfrm>
-            <a:off x="4297680" y="1188720"/>
-            <a:ext cx="7498079" cy="566928"/>
-          </a:xfrm>
-          <a:prstGeom prst="rect">
-            <a:avLst/>
-          </a:prstGeom>
-          <a:noFill/>
-          <a:ln w="6350">
-            <a:solidFill>
-              <a:srgbClr val="CCCCCC"/>
-            </a:solidFill>
-          </a:ln>
-        </p:spPr>
-        <p:style>
-          <a:lnRef idx="1">
-            <a:schemeClr val="accent1"/>
-          </a:lnRef>
-          <a:fillRef idx="3">
-            <a:schemeClr val="accent1"/>
-          </a:fillRef>
-          <a:effectRef idx="2">
-            <a:schemeClr val="accent1"/>
-          </a:effectRef>
-          <a:fontRef idx="minor">
-            <a:schemeClr val="lt1"/>
-          </a:fontRef>
-        </p:style>
-        <p:txBody>
-          <a:bodyPr rtlCol="0" anchor="ctr"/>
-          <a:lstStyle/>
-          <a:p>
-            <a:pPr algn="ctr"/>
-          </a:p>
-        </p:txBody>
-      </p:sp>
-      <p:sp>
-        <p:nvSpPr>
-          <p:cNvPr id="7" name="TextBox 6"/>
-          <p:cNvSpPr txBox="1"/>
-          <p:nvPr/>
-        </p:nvSpPr>
-        <p:spPr>
-          <a:xfrm>
-            <a:off x="4434840" y="1280160"/>
-            <a:ext cx="457200" cy="411480"/>
+            <a:off x="4892040" y="1325880"/>
+            <a:ext cx="6858000" cy="420624"/>
           </a:xfrm>
           <a:prstGeom prst="rect">
             <a:avLst/>
@@ -3705,60 +3425,26 @@
           <a:p>
             <a:pPr algn="l"/>
             <a:r>
-              <a:rPr sz="1400" b="0" i="0">
-                <a:solidFill>
-                  <a:srgbClr val="006BFF"/>
-                </a:solidFill>
-              </a:rPr>
-              <a:t>1</a:t>
-            </a:r>
-          </a:p>
-        </p:txBody>
-      </p:sp>
-      <p:sp>
-        <p:nvSpPr>
-          <p:cNvPr id="8" name="TextBox 7"/>
-          <p:cNvSpPr txBox="1"/>
+              <a:rPr sz="1300" b="0" i="0">
+                <a:solidFill>
+                  <a:srgbClr val="000000"/>
+                </a:solidFill>
+              </a:rPr>
+              <a:t>Architecture Design &amp; Decisions</a:t>
+            </a:r>
+          </a:p>
+        </p:txBody>
+      </p:sp>
+      <p:sp>
+        <p:nvSpPr>
+          <p:cNvPr id="6" name="Rectangle 5"/>
+          <p:cNvSpPr/>
           <p:nvPr/>
         </p:nvSpPr>
         <p:spPr>
           <a:xfrm>
-            <a:off x="4892040" y="1280160"/>
-            <a:ext cx="6766560" cy="411480"/>
-          </a:xfrm>
-          <a:prstGeom prst="rect">
-            <a:avLst/>
-          </a:prstGeom>
-          <a:noFill/>
-        </p:spPr>
-        <p:txBody>
-          <a:bodyPr wrap="square">
-            <a:spAutoFit/>
-          </a:bodyPr>
-          <a:lstStyle/>
-          <a:p>
-            <a:pPr algn="l"/>
-            <a:r>
-              <a:rPr sz="1300" b="0" i="0">
-                <a:solidFill>
-                  <a:srgbClr val="000000"/>
-                </a:solidFill>
-              </a:rPr>
-              <a:t>Architecture Design &amp; Decisions</a:t>
-            </a:r>
-          </a:p>
-        </p:txBody>
-      </p:sp>
-      <p:sp>
-        <p:nvSpPr>
-          <p:cNvPr id="9" name="Rectangle 8"/>
-          <p:cNvSpPr/>
-          <p:nvPr/>
-        </p:nvSpPr>
-        <p:spPr>
-          <a:xfrm>
-            <a:off x="4297680" y="1847088"/>
-            <a:ext cx="7498079" cy="566928"/>
+            <a:off x="4297680" y="1911096"/>
+            <a:ext cx="7589520" cy="585216"/>
           </a:xfrm>
           <a:prstGeom prst="rect">
             <a:avLst/>
@@ -3794,57 +3480,14 @@
       </p:sp>
       <p:sp>
         <p:nvSpPr>
-          <p:cNvPr id="10" name="Rectangle 9"/>
-          <p:cNvSpPr/>
+          <p:cNvPr id="7" name="TextBox 6"/>
+          <p:cNvSpPr txBox="1"/>
           <p:nvPr/>
         </p:nvSpPr>
         <p:spPr>
           <a:xfrm>
-            <a:off x="4297680" y="1847088"/>
-            <a:ext cx="7498079" cy="566928"/>
-          </a:xfrm>
-          <a:prstGeom prst="rect">
-            <a:avLst/>
-          </a:prstGeom>
-          <a:noFill/>
-          <a:ln w="6350">
-            <a:solidFill>
-              <a:srgbClr val="CCCCCC"/>
-            </a:solidFill>
-          </a:ln>
-        </p:spPr>
-        <p:style>
-          <a:lnRef idx="1">
-            <a:schemeClr val="accent1"/>
-          </a:lnRef>
-          <a:fillRef idx="3">
-            <a:schemeClr val="accent1"/>
-          </a:fillRef>
-          <a:effectRef idx="2">
-            <a:schemeClr val="accent1"/>
-          </a:effectRef>
-          <a:fontRef idx="minor">
-            <a:schemeClr val="lt1"/>
-          </a:fontRef>
-        </p:style>
-        <p:txBody>
-          <a:bodyPr rtlCol="0" anchor="ctr"/>
-          <a:lstStyle/>
-          <a:p>
-            <a:pPr algn="ctr"/>
-          </a:p>
-        </p:txBody>
-      </p:sp>
-      <p:sp>
-        <p:nvSpPr>
-          <p:cNvPr id="11" name="TextBox 10"/>
-          <p:cNvSpPr txBox="1"/>
-          <p:nvPr/>
-        </p:nvSpPr>
-        <p:spPr>
-          <a:xfrm>
-            <a:off x="4434840" y="1938528"/>
-            <a:ext cx="457200" cy="411480"/>
+            <a:off x="4434840" y="2002536"/>
+            <a:ext cx="411480" cy="420624"/>
           </a:xfrm>
           <a:prstGeom prst="rect">
             <a:avLst/>
@@ -3859,7 +3502,7 @@
           <a:p>
             <a:pPr algn="l"/>
             <a:r>
-              <a:rPr sz="1400" b="1" i="0">
+              <a:rPr sz="1300" b="1" i="0">
                 <a:solidFill>
                   <a:srgbClr val="006BFF"/>
                 </a:solidFill>
@@ -3871,14 +3514,14 @@
       </p:sp>
       <p:sp>
         <p:nvSpPr>
-          <p:cNvPr id="12" name="TextBox 11"/>
+          <p:cNvPr id="8" name="TextBox 7"/>
           <p:cNvSpPr txBox="1"/>
           <p:nvPr/>
         </p:nvSpPr>
         <p:spPr>
           <a:xfrm>
-            <a:off x="4892040" y="1938528"/>
-            <a:ext cx="6766560" cy="411480"/>
+            <a:off x="4892040" y="2002536"/>
+            <a:ext cx="6858000" cy="420624"/>
           </a:xfrm>
           <a:prstGeom prst="rect">
             <a:avLst/>
@@ -3905,100 +3548,14 @@
       </p:sp>
       <p:sp>
         <p:nvSpPr>
-          <p:cNvPr id="13" name="Rectangle 12"/>
-          <p:cNvSpPr/>
+          <p:cNvPr id="9" name="TextBox 8"/>
+          <p:cNvSpPr txBox="1"/>
           <p:nvPr/>
         </p:nvSpPr>
         <p:spPr>
           <a:xfrm>
-            <a:off x="4297680" y="2505456"/>
-            <a:ext cx="7498079" cy="566928"/>
-          </a:xfrm>
-          <a:prstGeom prst="rect">
-            <a:avLst/>
-          </a:prstGeom>
-          <a:solidFill>
-            <a:srgbClr val="FFFFFF"/>
-          </a:solidFill>
-          <a:ln>
-            <a:noFill/>
-          </a:ln>
-        </p:spPr>
-        <p:style>
-          <a:lnRef idx="1">
-            <a:schemeClr val="accent1"/>
-          </a:lnRef>
-          <a:fillRef idx="3">
-            <a:schemeClr val="accent1"/>
-          </a:fillRef>
-          <a:effectRef idx="2">
-            <a:schemeClr val="accent1"/>
-          </a:effectRef>
-          <a:fontRef idx="minor">
-            <a:schemeClr val="lt1"/>
-          </a:fontRef>
-        </p:style>
-        <p:txBody>
-          <a:bodyPr rtlCol="0" anchor="ctr"/>
-          <a:lstStyle/>
-          <a:p>
-            <a:pPr algn="ctr"/>
-          </a:p>
-        </p:txBody>
-      </p:sp>
-      <p:sp>
-        <p:nvSpPr>
-          <p:cNvPr id="14" name="Rectangle 13"/>
-          <p:cNvSpPr/>
-          <p:nvPr/>
-        </p:nvSpPr>
-        <p:spPr>
-          <a:xfrm>
-            <a:off x="4297680" y="2505456"/>
-            <a:ext cx="7498079" cy="566928"/>
-          </a:xfrm>
-          <a:prstGeom prst="rect">
-            <a:avLst/>
-          </a:prstGeom>
-          <a:noFill/>
-          <a:ln w="6350">
-            <a:solidFill>
-              <a:srgbClr val="CCCCCC"/>
-            </a:solidFill>
-          </a:ln>
-        </p:spPr>
-        <p:style>
-          <a:lnRef idx="1">
-            <a:schemeClr val="accent1"/>
-          </a:lnRef>
-          <a:fillRef idx="3">
-            <a:schemeClr val="accent1"/>
-          </a:fillRef>
-          <a:effectRef idx="2">
-            <a:schemeClr val="accent1"/>
-          </a:effectRef>
-          <a:fontRef idx="minor">
-            <a:schemeClr val="lt1"/>
-          </a:fontRef>
-        </p:style>
-        <p:txBody>
-          <a:bodyPr rtlCol="0" anchor="ctr"/>
-          <a:lstStyle/>
-          <a:p>
-            <a:pPr algn="ctr"/>
-          </a:p>
-        </p:txBody>
-      </p:sp>
-      <p:sp>
-        <p:nvSpPr>
-          <p:cNvPr id="15" name="TextBox 14"/>
-          <p:cNvSpPr txBox="1"/>
-          <p:nvPr/>
-        </p:nvSpPr>
-        <p:spPr>
-          <a:xfrm>
-            <a:off x="4434840" y="2596896"/>
-            <a:ext cx="457200" cy="411480"/>
+            <a:off x="4434840" y="2679192"/>
+            <a:ext cx="411480" cy="420624"/>
           </a:xfrm>
           <a:prstGeom prst="rect">
             <a:avLst/>
@@ -4013,7 +3570,7 @@
           <a:p>
             <a:pPr algn="l"/>
             <a:r>
-              <a:rPr sz="1400" b="0" i="0">
+              <a:rPr sz="1300" b="0" i="0">
                 <a:solidFill>
                   <a:srgbClr val="006BFF"/>
                 </a:solidFill>
@@ -4025,14 +3582,14 @@
       </p:sp>
       <p:sp>
         <p:nvSpPr>
-          <p:cNvPr id="16" name="TextBox 15"/>
+          <p:cNvPr id="10" name="TextBox 9"/>
           <p:cNvSpPr txBox="1"/>
           <p:nvPr/>
         </p:nvSpPr>
         <p:spPr>
           <a:xfrm>
-            <a:off x="4892040" y="2596896"/>
-            <a:ext cx="6766560" cy="411480"/>
+            <a:off x="4892040" y="2679192"/>
+            <a:ext cx="6858000" cy="420624"/>
           </a:xfrm>
           <a:prstGeom prst="rect">
             <a:avLst/>
@@ -4059,14 +3616,14 @@
       </p:sp>
       <p:sp>
         <p:nvSpPr>
-          <p:cNvPr id="17" name="Rectangle 16"/>
+          <p:cNvPr id="11" name="Rectangle 10"/>
           <p:cNvSpPr/>
           <p:nvPr/>
         </p:nvSpPr>
         <p:spPr>
           <a:xfrm>
-            <a:off x="4297680" y="3163824"/>
-            <a:ext cx="7498079" cy="566928"/>
+            <a:off x="4297680" y="3264408"/>
+            <a:ext cx="7589520" cy="585216"/>
           </a:xfrm>
           <a:prstGeom prst="rect">
             <a:avLst/>
@@ -4102,57 +3659,14 @@
       </p:sp>
       <p:sp>
         <p:nvSpPr>
-          <p:cNvPr id="18" name="Rectangle 17"/>
-          <p:cNvSpPr/>
+          <p:cNvPr id="12" name="TextBox 11"/>
+          <p:cNvSpPr txBox="1"/>
           <p:nvPr/>
         </p:nvSpPr>
         <p:spPr>
           <a:xfrm>
-            <a:off x="4297680" y="3163824"/>
-            <a:ext cx="7498079" cy="566928"/>
-          </a:xfrm>
-          <a:prstGeom prst="rect">
-            <a:avLst/>
-          </a:prstGeom>
-          <a:noFill/>
-          <a:ln w="6350">
-            <a:solidFill>
-              <a:srgbClr val="CCCCCC"/>
-            </a:solidFill>
-          </a:ln>
-        </p:spPr>
-        <p:style>
-          <a:lnRef idx="1">
-            <a:schemeClr val="accent1"/>
-          </a:lnRef>
-          <a:fillRef idx="3">
-            <a:schemeClr val="accent1"/>
-          </a:fillRef>
-          <a:effectRef idx="2">
-            <a:schemeClr val="accent1"/>
-          </a:effectRef>
-          <a:fontRef idx="minor">
-            <a:schemeClr val="lt1"/>
-          </a:fontRef>
-        </p:style>
-        <p:txBody>
-          <a:bodyPr rtlCol="0" anchor="ctr"/>
-          <a:lstStyle/>
-          <a:p>
-            <a:pPr algn="ctr"/>
-          </a:p>
-        </p:txBody>
-      </p:sp>
-      <p:sp>
-        <p:nvSpPr>
-          <p:cNvPr id="19" name="TextBox 18"/>
-          <p:cNvSpPr txBox="1"/>
-          <p:nvPr/>
-        </p:nvSpPr>
-        <p:spPr>
-          <a:xfrm>
-            <a:off x="4434840" y="3255264"/>
-            <a:ext cx="457200" cy="411480"/>
+            <a:off x="4434840" y="3355848"/>
+            <a:ext cx="411480" cy="420624"/>
           </a:xfrm>
           <a:prstGeom prst="rect">
             <a:avLst/>
@@ -4167,7 +3681,7 @@
           <a:p>
             <a:pPr algn="l"/>
             <a:r>
-              <a:rPr sz="1400" b="1" i="0">
+              <a:rPr sz="1300" b="1" i="0">
                 <a:solidFill>
                   <a:srgbClr val="006BFF"/>
                 </a:solidFill>
@@ -4179,14 +3693,14 @@
       </p:sp>
       <p:sp>
         <p:nvSpPr>
-          <p:cNvPr id="20" name="TextBox 19"/>
+          <p:cNvPr id="13" name="TextBox 12"/>
           <p:cNvSpPr txBox="1"/>
           <p:nvPr/>
         </p:nvSpPr>
         <p:spPr>
           <a:xfrm>
-            <a:off x="4892040" y="3255264"/>
-            <a:ext cx="6766560" cy="411480"/>
+            <a:off x="4892040" y="3355848"/>
+            <a:ext cx="6858000" cy="420624"/>
           </a:xfrm>
           <a:prstGeom prst="rect">
             <a:avLst/>
@@ -4213,100 +3727,14 @@
       </p:sp>
       <p:sp>
         <p:nvSpPr>
-          <p:cNvPr id="21" name="Rectangle 20"/>
-          <p:cNvSpPr/>
+          <p:cNvPr id="14" name="TextBox 13"/>
+          <p:cNvSpPr txBox="1"/>
           <p:nvPr/>
         </p:nvSpPr>
         <p:spPr>
           <a:xfrm>
-            <a:off x="4297680" y="3822192"/>
-            <a:ext cx="7498079" cy="566928"/>
-          </a:xfrm>
-          <a:prstGeom prst="rect">
-            <a:avLst/>
-          </a:prstGeom>
-          <a:solidFill>
-            <a:srgbClr val="FFFFFF"/>
-          </a:solidFill>
-          <a:ln>
-            <a:noFill/>
-          </a:ln>
-        </p:spPr>
-        <p:style>
-          <a:lnRef idx="1">
-            <a:schemeClr val="accent1"/>
-          </a:lnRef>
-          <a:fillRef idx="3">
-            <a:schemeClr val="accent1"/>
-          </a:fillRef>
-          <a:effectRef idx="2">
-            <a:schemeClr val="accent1"/>
-          </a:effectRef>
-          <a:fontRef idx="minor">
-            <a:schemeClr val="lt1"/>
-          </a:fontRef>
-        </p:style>
-        <p:txBody>
-          <a:bodyPr rtlCol="0" anchor="ctr"/>
-          <a:lstStyle/>
-          <a:p>
-            <a:pPr algn="ctr"/>
-          </a:p>
-        </p:txBody>
-      </p:sp>
-      <p:sp>
-        <p:nvSpPr>
-          <p:cNvPr id="22" name="Rectangle 21"/>
-          <p:cNvSpPr/>
-          <p:nvPr/>
-        </p:nvSpPr>
-        <p:spPr>
-          <a:xfrm>
-            <a:off x="4297680" y="3822192"/>
-            <a:ext cx="7498079" cy="566928"/>
-          </a:xfrm>
-          <a:prstGeom prst="rect">
-            <a:avLst/>
-          </a:prstGeom>
-          <a:noFill/>
-          <a:ln w="6350">
-            <a:solidFill>
-              <a:srgbClr val="CCCCCC"/>
-            </a:solidFill>
-          </a:ln>
-        </p:spPr>
-        <p:style>
-          <a:lnRef idx="1">
-            <a:schemeClr val="accent1"/>
-          </a:lnRef>
-          <a:fillRef idx="3">
-            <a:schemeClr val="accent1"/>
-          </a:fillRef>
-          <a:effectRef idx="2">
-            <a:schemeClr val="accent1"/>
-          </a:effectRef>
-          <a:fontRef idx="minor">
-            <a:schemeClr val="lt1"/>
-          </a:fontRef>
-        </p:style>
-        <p:txBody>
-          <a:bodyPr rtlCol="0" anchor="ctr"/>
-          <a:lstStyle/>
-          <a:p>
-            <a:pPr algn="ctr"/>
-          </a:p>
-        </p:txBody>
-      </p:sp>
-      <p:sp>
-        <p:nvSpPr>
-          <p:cNvPr id="23" name="TextBox 22"/>
-          <p:cNvSpPr txBox="1"/>
-          <p:nvPr/>
-        </p:nvSpPr>
-        <p:spPr>
-          <a:xfrm>
-            <a:off x="4434840" y="3913632"/>
-            <a:ext cx="457200" cy="411480"/>
+            <a:off x="4434840" y="4032504"/>
+            <a:ext cx="411480" cy="420624"/>
           </a:xfrm>
           <a:prstGeom prst="rect">
             <a:avLst/>
@@ -4321,7 +3749,7 @@
           <a:p>
             <a:pPr algn="l"/>
             <a:r>
-              <a:rPr sz="1400" b="0" i="0">
+              <a:rPr sz="1300" b="0" i="0">
                 <a:solidFill>
                   <a:srgbClr val="006BFF"/>
                 </a:solidFill>
@@ -4333,14 +3761,14 @@
       </p:sp>
       <p:sp>
         <p:nvSpPr>
-          <p:cNvPr id="24" name="TextBox 23"/>
+          <p:cNvPr id="15" name="TextBox 14"/>
           <p:cNvSpPr txBox="1"/>
           <p:nvPr/>
         </p:nvSpPr>
         <p:spPr>
           <a:xfrm>
-            <a:off x="4892040" y="3913632"/>
-            <a:ext cx="6766560" cy="411480"/>
+            <a:off x="4892040" y="4032504"/>
+            <a:ext cx="6858000" cy="420624"/>
           </a:xfrm>
           <a:prstGeom prst="rect">
             <a:avLst/>
@@ -4361,40 +3789,6 @@
                 </a:solidFill>
               </a:rPr>
               <a:t>Testing Strategy</a:t>
-            </a:r>
-          </a:p>
-        </p:txBody>
-      </p:sp>
-      <p:sp>
-        <p:nvSpPr>
-          <p:cNvPr id="25" name="TextBox 24"/>
-          <p:cNvSpPr txBox="1"/>
-          <p:nvPr/>
-        </p:nvSpPr>
-        <p:spPr>
-          <a:xfrm>
-            <a:off x="10543032" y="6446520"/>
-            <a:ext cx="1463040" cy="320040"/>
-          </a:xfrm>
-          <a:prstGeom prst="rect">
-            <a:avLst/>
-          </a:prstGeom>
-          <a:noFill/>
-        </p:spPr>
-        <p:txBody>
-          <a:bodyPr wrap="square">
-            <a:spAutoFit/>
-          </a:bodyPr>
-          <a:lstStyle/>
-          <a:p>
-            <a:pPr algn="r"/>
-            <a:r>
-              <a:rPr sz="1400" b="1" i="0">
-                <a:solidFill>
-                  <a:srgbClr val="006BFF"/>
-                </a:solidFill>
-              </a:rPr>
-              <a:t>HCLTech</a:t>
             </a:r>
           </a:p>
         </p:txBody>
@@ -4417,16 +3811,40 @@
         <p:nvPr/>
       </p:nvGrpSpPr>
       <p:grpSpPr/>
-      <p:sp>
-        <p:nvSpPr>
-          <p:cNvPr id="2" name="TextBox 1"/>
+      <p:pic>
+        <p:nvPicPr>
+          <p:cNvPr id="2" name="Picture 1" descr="image3.png"/>
+          <p:cNvPicPr>
+            <a:picLocks noChangeAspect="1"/>
+          </p:cNvPicPr>
+          <p:nvPr/>
+        </p:nvPicPr>
+        <p:blipFill>
+          <a:blip r:embed="rId2"/>
+          <a:stretch>
+            <a:fillRect/>
+          </a:stretch>
+        </p:blipFill>
+        <p:spPr>
+          <a:xfrm>
+            <a:off x="0" y="0"/>
+            <a:ext cx="12188952" cy="6858000"/>
+          </a:xfrm>
+          <a:prstGeom prst="rect">
+            <a:avLst/>
+          </a:prstGeom>
+        </p:spPr>
+      </p:pic>
+      <p:sp>
+        <p:nvSpPr>
+          <p:cNvPr id="3" name="TextBox 2"/>
           <p:cNvSpPr txBox="1"/>
           <p:nvPr/>
         </p:nvSpPr>
         <p:spPr>
           <a:xfrm>
-            <a:off x="228600" y="91440"/>
-            <a:ext cx="3657600" cy="274320"/>
+            <a:off x="457200" y="201168"/>
+            <a:ext cx="11247120" cy="777240"/>
           </a:xfrm>
           <a:prstGeom prst="rect">
             <a:avLst/>
@@ -4441,26 +3859,26 @@
           <a:p>
             <a:pPr algn="l"/>
             <a:r>
-              <a:rPr sz="900" b="0" i="0">
-                <a:solidFill>
-                  <a:srgbClr val="00B050"/>
-                </a:solidFill>
-              </a:rPr>
-              <a:t>Classification: Internal</a:t>
-            </a:r>
-          </a:p>
-        </p:txBody>
-      </p:sp>
-      <p:sp>
-        <p:nvSpPr>
-          <p:cNvPr id="3" name="TextBox 2"/>
+              <a:rPr sz="3000" b="1" i="0">
+                <a:solidFill>
+                  <a:srgbClr val="000000"/>
+                </a:solidFill>
+              </a:rPr>
+              <a:t>Architecture Design &amp; Decisions</a:t>
+            </a:r>
+          </a:p>
+        </p:txBody>
+      </p:sp>
+      <p:sp>
+        <p:nvSpPr>
+          <p:cNvPr id="4" name="TextBox 3"/>
           <p:cNvSpPr txBox="1"/>
           <p:nvPr/>
         </p:nvSpPr>
         <p:spPr>
           <a:xfrm>
-            <a:off x="228600" y="6492240"/>
-            <a:ext cx="4572000" cy="274320"/>
+            <a:off x="502920" y="1325880"/>
+            <a:ext cx="11155680" cy="5212080"/>
           </a:xfrm>
           <a:prstGeom prst="rect">
             <a:avLst/>
@@ -4473,490 +3891,318 @@
           </a:bodyPr>
           <a:lstStyle/>
           <a:p>
-            <a:pPr algn="l"/>
-            <a:r>
-              <a:rPr sz="800" b="0" i="0">
-                <a:solidFill>
-                  <a:srgbClr val="666666"/>
-                </a:solidFill>
-              </a:rPr>
-              <a:t>Copyright © 2025 HCLTech | Confidential</a:t>
-            </a:r>
-          </a:p>
-        </p:txBody>
-      </p:sp>
-      <p:sp>
-        <p:nvSpPr>
-          <p:cNvPr id="4" name="TextBox 3"/>
-          <p:cNvSpPr txBox="1"/>
-          <p:nvPr/>
-        </p:nvSpPr>
-        <p:spPr>
-          <a:xfrm>
-            <a:off x="10543032" y="6446520"/>
-            <a:ext cx="1463040" cy="320040"/>
-          </a:xfrm>
-          <a:prstGeom prst="rect">
-            <a:avLst/>
-          </a:prstGeom>
-          <a:noFill/>
-        </p:spPr>
-        <p:txBody>
-          <a:bodyPr wrap="square">
-            <a:spAutoFit/>
-          </a:bodyPr>
-          <a:lstStyle/>
-          <a:p>
-            <a:pPr algn="r"/>
-            <a:r>
-              <a:rPr sz="1400" b="1" i="0">
+            <a:pPr>
+              <a:spcBef>
+                <a:spcPts val="800"/>
+              </a:spcBef>
+              <a:spcAft>
+                <a:spcPts val="100"/>
+              </a:spcAft>
+            </a:pPr>
+            <a:r>
+              <a:rPr sz="1400" b="1">
                 <a:solidFill>
                   <a:srgbClr val="006BFF"/>
                 </a:solidFill>
               </a:rPr>
-              <a:t>HCLTech</a:t>
-            </a:r>
-          </a:p>
-        </p:txBody>
-      </p:sp>
-      <p:sp>
-        <p:nvSpPr>
-          <p:cNvPr id="5" name="TextBox 4"/>
-          <p:cNvSpPr txBox="1"/>
-          <p:nvPr/>
-        </p:nvSpPr>
-        <p:spPr>
-          <a:xfrm>
-            <a:off x="457200" y="228600"/>
-            <a:ext cx="10972800" cy="777240"/>
-          </a:xfrm>
-          <a:prstGeom prst="rect">
-            <a:avLst/>
-          </a:prstGeom>
-          <a:noFill/>
-        </p:spPr>
-        <p:txBody>
-          <a:bodyPr wrap="square">
-            <a:spAutoFit/>
-          </a:bodyPr>
-          <a:lstStyle/>
-          <a:p>
-            <a:pPr algn="l"/>
-            <a:r>
-              <a:rPr sz="3200" b="1" i="0">
-                <a:solidFill>
-                  <a:srgbClr val="000000"/>
-                </a:solidFill>
-              </a:rPr>
-              <a:t>Architecture Design &amp; Decisions</a:t>
-            </a:r>
-          </a:p>
-        </p:txBody>
-      </p:sp>
-      <p:sp>
-        <p:nvSpPr>
-          <p:cNvPr id="6" name="Rectangle 5"/>
-          <p:cNvSpPr/>
-          <p:nvPr/>
-        </p:nvSpPr>
-        <p:spPr>
-          <a:xfrm>
-            <a:off x="457200" y="1097280"/>
-            <a:ext cx="11247120" cy="27432"/>
-          </a:xfrm>
-          <a:prstGeom prst="rect">
-            <a:avLst/>
-          </a:prstGeom>
-          <a:solidFill>
-            <a:srgbClr val="006BFF"/>
-          </a:solidFill>
-          <a:ln>
-            <a:noFill/>
-          </a:ln>
-        </p:spPr>
-        <p:style>
-          <a:lnRef idx="1">
-            <a:schemeClr val="accent1"/>
-          </a:lnRef>
-          <a:fillRef idx="3">
-            <a:schemeClr val="accent1"/>
-          </a:fillRef>
-          <a:effectRef idx="2">
-            <a:schemeClr val="accent1"/>
-          </a:effectRef>
-          <a:fontRef idx="minor">
-            <a:schemeClr val="lt1"/>
-          </a:fontRef>
-        </p:style>
-        <p:txBody>
-          <a:bodyPr rtlCol="0" anchor="ctr"/>
-          <a:lstStyle/>
-          <a:p>
-            <a:pPr algn="ctr"/>
-          </a:p>
-        </p:txBody>
-      </p:sp>
-      <p:sp>
-        <p:nvSpPr>
-          <p:cNvPr id="7" name="TextBox 6"/>
-          <p:cNvSpPr txBox="1"/>
-          <p:nvPr/>
-        </p:nvSpPr>
-        <p:spPr>
-          <a:xfrm>
-            <a:off x="457200" y="1234440"/>
-            <a:ext cx="11247120" cy="5212080"/>
-          </a:xfrm>
-          <a:prstGeom prst="rect">
-            <a:avLst/>
-          </a:prstGeom>
-          <a:noFill/>
-        </p:spPr>
-        <p:txBody>
-          <a:bodyPr wrap="square">
-            <a:spAutoFit/>
-          </a:bodyPr>
-          <a:lstStyle/>
+              <a:t>Platform Overview</a:t>
+            </a:r>
+          </a:p>
+          <a:p>
+            <a:pPr>
+              <a:spcAft>
+                <a:spcPts val="100"/>
+              </a:spcAft>
+            </a:pPr>
+            <a:r>
+              <a:rPr sz="1100">
+                <a:solidFill>
+                  <a:srgbClr val="000000"/>
+                </a:solidFill>
+              </a:rPr>
+              <a:t>  •  Banking AI Log Analytics built on Azure Synapse using the Medallion Lakehouse pattern.</a:t>
+            </a:r>
+          </a:p>
+          <a:p>
+            <a:pPr>
+              <a:spcAft>
+                <a:spcPts val="100"/>
+              </a:spcAft>
+            </a:pPr>
+            <a:r>
+              <a:rPr sz="1100">
+                <a:solidFill>
+                  <a:srgbClr val="000000"/>
+                </a:solidFill>
+              </a:rPr>
+              <a:t>  •  Designed for banking-grade reliability, PII compliance, and regulatory auditability (Basel III, PSD2, GDPR).</a:t>
+            </a:r>
+          </a:p>
+          <a:p>
+            <a:pPr>
+              <a:spcAft>
+                <a:spcPts val="100"/>
+              </a:spcAft>
+            </a:pPr>
+            <a:r>
+              <a:rPr sz="600"/>
+              <a:t> </a:t>
+            </a:r>
+          </a:p>
           <a:p>
             <a:pPr>
               <a:spcBef>
-                <a:spcPts val="1000"/>
+                <a:spcPts val="800"/>
               </a:spcBef>
               <a:spcAft>
-                <a:spcPts val="200"/>
-              </a:spcAft>
-            </a:pPr>
-            <a:r>
-              <a:rPr sz="1500" b="1">
+                <a:spcPts val="100"/>
+              </a:spcAft>
+            </a:pPr>
+            <a:r>
+              <a:rPr sz="1400" b="1">
                 <a:solidFill>
                   <a:srgbClr val="006BFF"/>
                 </a:solidFill>
               </a:rPr>
-              <a:t>Platform Overview</a:t>
-            </a:r>
-          </a:p>
-          <a:p>
-            <a:pPr>
-              <a:spcAft>
-                <a:spcPts val="200"/>
-              </a:spcAft>
-            </a:pPr>
-            <a:r>
-              <a:rPr sz="1200">
-                <a:solidFill>
-                  <a:srgbClr val="000000"/>
-                </a:solidFill>
-              </a:rPr>
-              <a:t>AI Log Analytics Platform built on Azure Synapse Analytics using the Medallion (Bronze/Silver/Gold) Lakehouse pattern.</a:t>
-            </a:r>
-          </a:p>
-          <a:p>
-            <a:pPr>
-              <a:spcAft>
-                <a:spcPts val="200"/>
-              </a:spcAft>
-            </a:pPr>
-            <a:r>
-              <a:rPr sz="1200">
-                <a:solidFill>
-                  <a:srgbClr val="000000"/>
-                </a:solidFill>
-              </a:rPr>
-              <a:t>Designed for banking-grade reliability, PII compliance, and regulatory auditability (Basel III, PSD2, GDPR).</a:t>
-            </a:r>
-          </a:p>
-          <a:p>
-            <a:pPr>
-              <a:spcAft>
-                <a:spcPts val="200"/>
-              </a:spcAft>
-            </a:pPr>
-            <a:r>
-              <a:rPr sz="1200">
-                <a:solidFill>
-                  <a:srgbClr val="000000"/>
-                </a:solidFill>
-              </a:rPr>
-              <a:t/>
+              <a:t>Medallion Layers</a:t>
+            </a:r>
+          </a:p>
+          <a:p>
+            <a:pPr>
+              <a:spcAft>
+                <a:spcPts val="100"/>
+              </a:spcAft>
+            </a:pPr>
+            <a:r>
+              <a:rPr sz="1100">
+                <a:solidFill>
+                  <a:srgbClr val="000000"/>
+                </a:solidFill>
+              </a:rPr>
+              <a:t>  •  BRONZE  — Append-only raw log ingestion via Azure Event Hubs → ADLS Gen2. Immutable. 90-day retention.</a:t>
+            </a:r>
+          </a:p>
+          <a:p>
+            <a:pPr>
+              <a:spcAft>
+                <a:spcPts val="100"/>
+              </a:spcAft>
+            </a:pPr>
+            <a:r>
+              <a:rPr sz="1100">
+                <a:solidFill>
+                  <a:srgbClr val="000000"/>
+                </a:solidFill>
+              </a:rPr>
+              <a:t>  •  SILVER  — Cleansed, deduplicated, 3NF. SCD Type 2 on account &amp; customer dims. 1-year retention.</a:t>
+            </a:r>
+          </a:p>
+          <a:p>
+            <a:pPr>
+              <a:spcAft>
+                <a:spcPts val="100"/>
+              </a:spcAft>
+            </a:pPr>
+            <a:r>
+              <a:rPr sz="1100">
+                <a:solidFill>
+                  <a:srgbClr val="000000"/>
+                </a:solidFill>
+              </a:rPr>
+              <a:t>  •  GOLD    — Star schema (Kimball). AI-scored, pre-aggregated, Power BI Direct Lake-ready. 7-year retention.</a:t>
+            </a:r>
+          </a:p>
+          <a:p>
+            <a:pPr>
+              <a:spcAft>
+                <a:spcPts val="100"/>
+              </a:spcAft>
+            </a:pPr>
+            <a:r>
+              <a:rPr sz="600"/>
+              <a:t> </a:t>
             </a:r>
           </a:p>
           <a:p>
             <a:pPr>
               <a:spcBef>
-                <a:spcPts val="1000"/>
+                <a:spcPts val="800"/>
               </a:spcBef>
               <a:spcAft>
-                <a:spcPts val="200"/>
-              </a:spcAft>
-            </a:pPr>
-            <a:r>
-              <a:rPr sz="1500" b="1">
+                <a:spcPts val="100"/>
+              </a:spcAft>
+            </a:pPr>
+            <a:r>
+              <a:rPr sz="1400" b="1">
                 <a:solidFill>
                   <a:srgbClr val="006BFF"/>
                 </a:solidFill>
               </a:rPr>
-              <a:t>Medallion Layer Design</a:t>
-            </a:r>
-          </a:p>
-          <a:p>
-            <a:pPr lvl="1">
-              <a:spcAft>
-                <a:spcPts val="200"/>
-              </a:spcAft>
-            </a:pPr>
-            <a:r>
-              <a:rPr sz="1100">
-                <a:solidFill>
-                  <a:srgbClr val="000000"/>
-                </a:solidFill>
-              </a:rPr>
-              <a:t>  BRONZE  — Append-only raw log ingestion via Azure Event Hubs → ADLS Gen2 (Parquet/Delta). Immutable. 90-day retention.</a:t>
-            </a:r>
-          </a:p>
-          <a:p>
-            <a:pPr lvl="1">
-              <a:spcAft>
-                <a:spcPts val="200"/>
-              </a:spcAft>
-            </a:pPr>
-            <a:r>
-              <a:rPr sz="1100">
-                <a:solidFill>
-                  <a:srgbClr val="000000"/>
-                </a:solidFill>
-              </a:rPr>
-              <a:t>  SILVER  — Cleansed, deduplicated, conformed to 3NF. SCD Type 2 on account &amp; customer dims. 1-year retention.</a:t>
-            </a:r>
-          </a:p>
-          <a:p>
-            <a:pPr lvl="1">
-              <a:spcAft>
-                <a:spcPts val="200"/>
-              </a:spcAft>
-            </a:pPr>
-            <a:r>
-              <a:rPr sz="1100">
-                <a:solidFill>
-                  <a:srgbClr val="000000"/>
-                </a:solidFill>
-              </a:rPr>
-              <a:t>  GOLD    — Star schema (Kimball). AI-scored, pre-aggregated, Power BI-ready. 7-year retention (regulatory).</a:t>
-            </a:r>
-          </a:p>
-          <a:p>
-            <a:pPr>
-              <a:spcAft>
-                <a:spcPts val="200"/>
-              </a:spcAft>
-            </a:pPr>
-            <a:r>
-              <a:rPr sz="1200">
-                <a:solidFill>
-                  <a:srgbClr val="000000"/>
-                </a:solidFill>
-              </a:rPr>
-              <a:t/>
+              <a:t>Azure Services</a:t>
+            </a:r>
+          </a:p>
+          <a:p>
+            <a:pPr>
+              <a:spcAft>
+                <a:spcPts val="100"/>
+              </a:spcAft>
+            </a:pPr>
+            <a:r>
+              <a:rPr sz="1100">
+                <a:solidFill>
+                  <a:srgbClr val="000000"/>
+                </a:solidFill>
+              </a:rPr>
+              <a:t>  •  Ingestion: Azure Event Hubs (Standard, auto-inflate 10 TUs, Avro capture to ADLS)</a:t>
+            </a:r>
+          </a:p>
+          <a:p>
+            <a:pPr>
+              <a:spcAft>
+                <a:spcPts val="100"/>
+              </a:spcAft>
+            </a:pPr>
+            <a:r>
+              <a:rPr sz="1100">
+                <a:solidFill>
+                  <a:srgbClr val="000000"/>
+                </a:solidFill>
+              </a:rPr>
+              <a:t>  •  Processing: Synapse Spark Pools (MemoryOptimized, autoscale 3–10 nodes, Spark 3.4)</a:t>
+            </a:r>
+          </a:p>
+          <a:p>
+            <a:pPr>
+              <a:spcAft>
+                <a:spcPts val="100"/>
+              </a:spcAft>
+            </a:pPr>
+            <a:r>
+              <a:rPr sz="1100">
+                <a:solidFill>
+                  <a:srgbClr val="000000"/>
+                </a:solidFill>
+              </a:rPr>
+              <a:t>  •  Serving: Synapse Dedicated SQL Pool (DW100c) + Serverless SQL Pool</a:t>
+            </a:r>
+          </a:p>
+          <a:p>
+            <a:pPr>
+              <a:spcAft>
+                <a:spcPts val="100"/>
+              </a:spcAft>
+            </a:pPr>
+            <a:r>
+              <a:rPr sz="1100">
+                <a:solidFill>
+                  <a:srgbClr val="000000"/>
+                </a:solidFill>
+              </a:rPr>
+              <a:t>  •  AI/ML: Azure OpenAI (GPT-4o summarisation) + Z-score anomaly scoring in PySpark</a:t>
+            </a:r>
+          </a:p>
+          <a:p>
+            <a:pPr>
+              <a:spcAft>
+                <a:spcPts val="100"/>
+              </a:spcAft>
+            </a:pPr>
+            <a:r>
+              <a:rPr sz="1100">
+                <a:solidFill>
+                  <a:srgbClr val="000000"/>
+                </a:solidFill>
+              </a:rPr>
+              <a:t>  •  Secrets: Azure Key Vault (RBAC, purge-protected) — no credentials in code or config</a:t>
+            </a:r>
+          </a:p>
+          <a:p>
+            <a:pPr>
+              <a:spcAft>
+                <a:spcPts val="100"/>
+              </a:spcAft>
+            </a:pPr>
+            <a:r>
+              <a:rPr sz="1100">
+                <a:solidFill>
+                  <a:srgbClr val="000000"/>
+                </a:solidFill>
+              </a:rPr>
+              <a:t>  •  IaC: Bicep (parameterised by environment: dev / staging / prod)</a:t>
+            </a:r>
+          </a:p>
+          <a:p>
+            <a:pPr>
+              <a:spcAft>
+                <a:spcPts val="100"/>
+              </a:spcAft>
+            </a:pPr>
+            <a:r>
+              <a:rPr sz="600"/>
+              <a:t> </a:t>
             </a:r>
           </a:p>
           <a:p>
             <a:pPr>
               <a:spcBef>
-                <a:spcPts val="1000"/>
+                <a:spcPts val="800"/>
               </a:spcBef>
               <a:spcAft>
-                <a:spcPts val="200"/>
-              </a:spcAft>
-            </a:pPr>
-            <a:r>
-              <a:rPr sz="1500" b="1">
+                <a:spcPts val="100"/>
+              </a:spcAft>
+            </a:pPr>
+            <a:r>
+              <a:rPr sz="1400" b="1">
                 <a:solidFill>
                   <a:srgbClr val="006BFF"/>
                 </a:solidFill>
               </a:rPr>
-              <a:t>Azure Services</a:t>
-            </a:r>
-          </a:p>
-          <a:p>
-            <a:pPr lvl="1">
-              <a:spcAft>
-                <a:spcPts val="200"/>
-              </a:spcAft>
-            </a:pPr>
-            <a:r>
-              <a:rPr sz="1100">
-                <a:solidFill>
-                  <a:srgbClr val="000000"/>
-                </a:solidFill>
-              </a:rPr>
-              <a:t>  Ingestion: Azure Event Hubs (Standard, auto-inflate 10 TUs, Avro capture)</a:t>
-            </a:r>
-          </a:p>
-          <a:p>
-            <a:pPr lvl="1">
-              <a:spcAft>
-                <a:spcPts val="200"/>
-              </a:spcAft>
-            </a:pPr>
-            <a:r>
-              <a:rPr sz="1100">
-                <a:solidFill>
-                  <a:srgbClr val="000000"/>
-                </a:solidFill>
-              </a:rPr>
-              <a:t>  Processing: Synapse Spark Pools (MemoryOptimized, autoscale 3–10 nodes)</a:t>
-            </a:r>
-          </a:p>
-          <a:p>
-            <a:pPr lvl="1">
-              <a:spcAft>
-                <a:spcPts val="200"/>
-              </a:spcAft>
-            </a:pPr>
-            <a:r>
-              <a:rPr sz="1100">
-                <a:solidFill>
-                  <a:srgbClr val="000000"/>
-                </a:solidFill>
-              </a:rPr>
-              <a:t>  Serving:   Synapse Dedicated SQL Pool (DW100c) + Serverless SQL Pool</a:t>
-            </a:r>
-          </a:p>
-          <a:p>
-            <a:pPr lvl="1">
-              <a:spcAft>
-                <a:spcPts val="200"/>
-              </a:spcAft>
-            </a:pPr>
-            <a:r>
-              <a:rPr sz="1100">
-                <a:solidFill>
-                  <a:srgbClr val="000000"/>
-                </a:solidFill>
-              </a:rPr>
-              <a:t>  Storage:   ADLS Gen2 (ZRS, HNS enabled, shared-key auth disabled)</a:t>
-            </a:r>
-          </a:p>
-          <a:p>
-            <a:pPr lvl="1">
-              <a:spcAft>
-                <a:spcPts val="200"/>
-              </a:spcAft>
-            </a:pPr>
-            <a:r>
-              <a:rPr sz="1100">
-                <a:solidFill>
-                  <a:srgbClr val="000000"/>
-                </a:solidFill>
-              </a:rPr>
-              <a:t>  AI/ML:     Azure OpenAI (GPT-4o summarisation) + Z-score anomaly scoring</a:t>
-            </a:r>
-          </a:p>
-          <a:p>
-            <a:pPr lvl="1">
-              <a:spcAft>
-                <a:spcPts val="200"/>
-              </a:spcAft>
-            </a:pPr>
-            <a:r>
-              <a:rPr sz="1100">
-                <a:solidFill>
-                  <a:srgbClr val="000000"/>
-                </a:solidFill>
-              </a:rPr>
-              <a:t>  Secrets:   Azure Key Vault (RBAC, purge-protected) — no secrets in code</a:t>
-            </a:r>
-          </a:p>
-          <a:p>
-            <a:pPr lvl="1">
-              <a:spcAft>
-                <a:spcPts val="200"/>
-              </a:spcAft>
-            </a:pPr>
-            <a:r>
-              <a:rPr sz="1100">
-                <a:solidFill>
-                  <a:srgbClr val="000000"/>
-                </a:solidFill>
-              </a:rPr>
-              <a:t>  IaC:       Bicep (parameterised by environment: dev / staging / prod)</a:t>
-            </a:r>
-          </a:p>
-          <a:p>
-            <a:pPr>
-              <a:spcAft>
-                <a:spcPts val="200"/>
-              </a:spcAft>
-            </a:pPr>
-            <a:r>
-              <a:rPr sz="1200">
-                <a:solidFill>
-                  <a:srgbClr val="000000"/>
-                </a:solidFill>
-              </a:rPr>
-              <a:t/>
-            </a:r>
-          </a:p>
-          <a:p>
-            <a:pPr>
-              <a:spcBef>
-                <a:spcPts val="1000"/>
-              </a:spcBef>
-              <a:spcAft>
-                <a:spcPts val="200"/>
-              </a:spcAft>
-            </a:pPr>
-            <a:r>
-              <a:rPr sz="1500" b="1">
-                <a:solidFill>
-                  <a:srgbClr val="006BFF"/>
-                </a:solidFill>
-              </a:rPr>
-              <a:t>Key Decisions</a:t>
-            </a:r>
-          </a:p>
-          <a:p>
-            <a:pPr lvl="1">
-              <a:spcAft>
-                <a:spcPts val="200"/>
-              </a:spcAft>
-            </a:pPr>
-            <a:r>
-              <a:rPr sz="1100">
-                <a:solidFill>
-                  <a:srgbClr val="000000"/>
-                </a:solidFill>
-              </a:rPr>
-              <a:t>  Clustered Columnstore Index on all facts — columnar reads for banking aggregations</a:t>
-            </a:r>
-          </a:p>
-          <a:p>
-            <a:pPr lvl="1">
-              <a:spcAft>
-                <a:spcPts val="200"/>
-              </a:spcAft>
-            </a:pPr>
-            <a:r>
-              <a:rPr sz="1100">
-                <a:solidFill>
-                  <a:srgbClr val="000000"/>
-                </a:solidFill>
-              </a:rPr>
-              <a:t>  HASH distribution on account_sk / transaction_ref — eliminates shuffle on joins</a:t>
-            </a:r>
-          </a:p>
-          <a:p>
-            <a:pPr lvl="1">
-              <a:spcAft>
-                <a:spcPts val="200"/>
-              </a:spcAft>
-            </a:pPr>
-            <a:r>
-              <a:rPr sz="1100">
-                <a:solidFill>
-                  <a:srgbClr val="000000"/>
-                </a:solidFill>
-              </a:rPr>
-              <a:t>  Quarterly RANGE RIGHT partitions — aligns with regulatory reporting cadence</a:t>
+              <a:t>Key Architecture Decisions</a:t>
+            </a:r>
+          </a:p>
+          <a:p>
+            <a:pPr>
+              <a:spcAft>
+                <a:spcPts val="100"/>
+              </a:spcAft>
+            </a:pPr>
+            <a:r>
+              <a:rPr sz="1100">
+                <a:solidFill>
+                  <a:srgbClr val="000000"/>
+                </a:solidFill>
+              </a:rPr>
+              <a:t>  •  Clustered Columnstore Index on all facts — columnar reads optimised for banking aggregations</a:t>
+            </a:r>
+          </a:p>
+          <a:p>
+            <a:pPr>
+              <a:spcAft>
+                <a:spcPts val="100"/>
+              </a:spcAft>
+            </a:pPr>
+            <a:r>
+              <a:rPr sz="1100">
+                <a:solidFill>
+                  <a:srgbClr val="000000"/>
+                </a:solidFill>
+              </a:rPr>
+              <a:t>  •  HASH distribution on account_sk / transaction_ref — eliminates data movement on joins</a:t>
+            </a:r>
+          </a:p>
+          <a:p>
+            <a:pPr>
+              <a:spcAft>
+                <a:spcPts val="100"/>
+              </a:spcAft>
+            </a:pPr>
+            <a:r>
+              <a:rPr sz="1100">
+                <a:solidFill>
+                  <a:srgbClr val="000000"/>
+                </a:solidFill>
+              </a:rPr>
+              <a:t>  •  Quarterly RANGE RIGHT partitions — aligned with regulatory reporting cadence</a:t>
             </a:r>
           </a:p>
         </p:txBody>
@@ -4979,16 +4225,40 @@
         <p:nvPr/>
       </p:nvGrpSpPr>
       <p:grpSpPr/>
-      <p:sp>
-        <p:nvSpPr>
-          <p:cNvPr id="2" name="TextBox 1"/>
+      <p:pic>
+        <p:nvPicPr>
+          <p:cNvPr id="2" name="Picture 1" descr="image3.png"/>
+          <p:cNvPicPr>
+            <a:picLocks noChangeAspect="1"/>
+          </p:cNvPicPr>
+          <p:nvPr/>
+        </p:nvPicPr>
+        <p:blipFill>
+          <a:blip r:embed="rId2"/>
+          <a:stretch>
+            <a:fillRect/>
+          </a:stretch>
+        </p:blipFill>
+        <p:spPr>
+          <a:xfrm>
+            <a:off x="0" y="0"/>
+            <a:ext cx="12188952" cy="6858000"/>
+          </a:xfrm>
+          <a:prstGeom prst="rect">
+            <a:avLst/>
+          </a:prstGeom>
+        </p:spPr>
+      </p:pic>
+      <p:sp>
+        <p:nvSpPr>
+          <p:cNvPr id="3" name="TextBox 2"/>
           <p:cNvSpPr txBox="1"/>
           <p:nvPr/>
         </p:nvSpPr>
         <p:spPr>
           <a:xfrm>
-            <a:off x="228600" y="91440"/>
-            <a:ext cx="3657600" cy="274320"/>
+            <a:off x="457200" y="201168"/>
+            <a:ext cx="11247120" cy="777240"/>
           </a:xfrm>
           <a:prstGeom prst="rect">
             <a:avLst/>
@@ -5003,26 +4273,26 @@
           <a:p>
             <a:pPr algn="l"/>
             <a:r>
-              <a:rPr sz="900" b="0" i="0">
-                <a:solidFill>
-                  <a:srgbClr val="00B050"/>
-                </a:solidFill>
-              </a:rPr>
-              <a:t>Classification: Internal</a:t>
-            </a:r>
-          </a:p>
-        </p:txBody>
-      </p:sp>
-      <p:sp>
-        <p:nvSpPr>
-          <p:cNvPr id="3" name="TextBox 2"/>
+              <a:rPr sz="3000" b="1" i="0">
+                <a:solidFill>
+                  <a:srgbClr val="000000"/>
+                </a:solidFill>
+              </a:rPr>
+              <a:t>GIT Details &amp; Working Platform</a:t>
+            </a:r>
+          </a:p>
+        </p:txBody>
+      </p:sp>
+      <p:sp>
+        <p:nvSpPr>
+          <p:cNvPr id="4" name="TextBox 3"/>
           <p:cNvSpPr txBox="1"/>
           <p:nvPr/>
         </p:nvSpPr>
         <p:spPr>
           <a:xfrm>
-            <a:off x="228600" y="6492240"/>
-            <a:ext cx="4572000" cy="274320"/>
+            <a:off x="502920" y="1325880"/>
+            <a:ext cx="11155680" cy="5212080"/>
           </a:xfrm>
           <a:prstGeom prst="rect">
             <a:avLst/>
@@ -5035,520 +4305,348 @@
           </a:bodyPr>
           <a:lstStyle/>
           <a:p>
-            <a:pPr algn="l"/>
-            <a:r>
-              <a:rPr sz="800" b="0" i="0">
-                <a:solidFill>
-                  <a:srgbClr val="666666"/>
-                </a:solidFill>
-              </a:rPr>
-              <a:t>Copyright © 2025 HCLTech | Confidential</a:t>
-            </a:r>
-          </a:p>
-        </p:txBody>
-      </p:sp>
-      <p:sp>
-        <p:nvSpPr>
-          <p:cNvPr id="4" name="TextBox 3"/>
-          <p:cNvSpPr txBox="1"/>
-          <p:nvPr/>
-        </p:nvSpPr>
-        <p:spPr>
-          <a:xfrm>
-            <a:off x="10543032" y="6446520"/>
-            <a:ext cx="1463040" cy="320040"/>
-          </a:xfrm>
-          <a:prstGeom prst="rect">
-            <a:avLst/>
-          </a:prstGeom>
-          <a:noFill/>
-        </p:spPr>
-        <p:txBody>
-          <a:bodyPr wrap="square">
-            <a:spAutoFit/>
-          </a:bodyPr>
-          <a:lstStyle/>
-          <a:p>
-            <a:pPr algn="r"/>
-            <a:r>
-              <a:rPr sz="1400" b="1" i="0">
+            <a:pPr>
+              <a:spcBef>
+                <a:spcPts val="800"/>
+              </a:spcBef>
+              <a:spcAft>
+                <a:spcPts val="100"/>
+              </a:spcAft>
+            </a:pPr>
+            <a:r>
+              <a:rPr sz="1400" b="1">
                 <a:solidFill>
                   <a:srgbClr val="006BFF"/>
                 </a:solidFill>
               </a:rPr>
-              <a:t>HCLTech</a:t>
-            </a:r>
-          </a:p>
-        </p:txBody>
-      </p:sp>
-      <p:sp>
-        <p:nvSpPr>
-          <p:cNvPr id="5" name="TextBox 4"/>
-          <p:cNvSpPr txBox="1"/>
-          <p:nvPr/>
-        </p:nvSpPr>
-        <p:spPr>
-          <a:xfrm>
-            <a:off x="457200" y="228600"/>
-            <a:ext cx="10972800" cy="777240"/>
-          </a:xfrm>
-          <a:prstGeom prst="rect">
-            <a:avLst/>
-          </a:prstGeom>
-          <a:noFill/>
-        </p:spPr>
-        <p:txBody>
-          <a:bodyPr wrap="square">
-            <a:spAutoFit/>
-          </a:bodyPr>
-          <a:lstStyle/>
-          <a:p>
-            <a:pPr algn="l"/>
-            <a:r>
-              <a:rPr sz="3200" b="1" i="0">
-                <a:solidFill>
-                  <a:srgbClr val="000000"/>
-                </a:solidFill>
-              </a:rPr>
-              <a:t>GIT Details &amp; Working Platform</a:t>
-            </a:r>
-          </a:p>
-        </p:txBody>
-      </p:sp>
-      <p:sp>
-        <p:nvSpPr>
-          <p:cNvPr id="6" name="Rectangle 5"/>
-          <p:cNvSpPr/>
-          <p:nvPr/>
-        </p:nvSpPr>
-        <p:spPr>
-          <a:xfrm>
-            <a:off x="457200" y="1097280"/>
-            <a:ext cx="11247120" cy="27432"/>
-          </a:xfrm>
-          <a:prstGeom prst="rect">
-            <a:avLst/>
-          </a:prstGeom>
-          <a:solidFill>
-            <a:srgbClr val="006BFF"/>
-          </a:solidFill>
-          <a:ln>
-            <a:noFill/>
-          </a:ln>
-        </p:spPr>
-        <p:style>
-          <a:lnRef idx="1">
-            <a:schemeClr val="accent1"/>
-          </a:lnRef>
-          <a:fillRef idx="3">
-            <a:schemeClr val="accent1"/>
-          </a:fillRef>
-          <a:effectRef idx="2">
-            <a:schemeClr val="accent1"/>
-          </a:effectRef>
-          <a:fontRef idx="minor">
-            <a:schemeClr val="lt1"/>
-          </a:fontRef>
-        </p:style>
-        <p:txBody>
-          <a:bodyPr rtlCol="0" anchor="ctr"/>
-          <a:lstStyle/>
-          <a:p>
-            <a:pPr algn="ctr"/>
-          </a:p>
-        </p:txBody>
-      </p:sp>
-      <p:sp>
-        <p:nvSpPr>
-          <p:cNvPr id="7" name="TextBox 6"/>
-          <p:cNvSpPr txBox="1"/>
-          <p:nvPr/>
-        </p:nvSpPr>
-        <p:spPr>
-          <a:xfrm>
-            <a:off x="457200" y="1234440"/>
-            <a:ext cx="11247120" cy="5212080"/>
-          </a:xfrm>
-          <a:prstGeom prst="rect">
-            <a:avLst/>
-          </a:prstGeom>
-          <a:noFill/>
-        </p:spPr>
-        <p:txBody>
-          <a:bodyPr wrap="square">
-            <a:spAutoFit/>
-          </a:bodyPr>
-          <a:lstStyle/>
+              <a:t>Repository Details</a:t>
+            </a:r>
+          </a:p>
+          <a:p>
+            <a:pPr>
+              <a:spcAft>
+                <a:spcPts val="100"/>
+              </a:spcAft>
+            </a:pPr>
+            <a:r>
+              <a:rPr sz="1100">
+                <a:solidFill>
+                  <a:srgbClr val="000000"/>
+                </a:solidFill>
+              </a:rPr>
+              <a:t>  •  Repo:    koundinyapappu-boop / ai-log-data-platform  (GitHub)</a:t>
+            </a:r>
+          </a:p>
+          <a:p>
+            <a:pPr>
+              <a:spcAft>
+                <a:spcPts val="100"/>
+              </a:spcAft>
+            </a:pPr>
+            <a:r>
+              <a:rPr sz="1100">
+                <a:solidFill>
+                  <a:srgbClr val="000000"/>
+                </a:solidFill>
+              </a:rPr>
+              <a:t>  •  Branch:  claude/affectionate-lovelace-519pwf</a:t>
+            </a:r>
+          </a:p>
+          <a:p>
+            <a:pPr>
+              <a:spcAft>
+                <a:spcPts val="100"/>
+              </a:spcAft>
+            </a:pPr>
+            <a:r>
+              <a:rPr sz="1100">
+                <a:solidFill>
+                  <a:srgbClr val="000000"/>
+                </a:solidFill>
+              </a:rPr>
+              <a:t>  •  15 files committed — ~5,500 lines of SQL / PySpark / Pipeline JSON / Bicep</a:t>
+            </a:r>
+          </a:p>
+          <a:p>
+            <a:pPr>
+              <a:spcAft>
+                <a:spcPts val="100"/>
+              </a:spcAft>
+            </a:pPr>
+            <a:r>
+              <a:rPr sz="600"/>
+              <a:t> </a:t>
+            </a:r>
+          </a:p>
           <a:p>
             <a:pPr>
               <a:spcBef>
-                <a:spcPts val="1000"/>
+                <a:spcPts val="800"/>
               </a:spcBef>
               <a:spcAft>
-                <a:spcPts val="200"/>
-              </a:spcAft>
-            </a:pPr>
-            <a:r>
-              <a:rPr sz="1500" b="1">
+                <a:spcPts val="100"/>
+              </a:spcAft>
+            </a:pPr>
+            <a:r>
+              <a:rPr sz="1400" b="1">
                 <a:solidFill>
                   <a:srgbClr val="006BFF"/>
                 </a:solidFill>
               </a:rPr>
-              <a:t>Repository</a:t>
-            </a:r>
-          </a:p>
-          <a:p>
-            <a:pPr lvl="1">
-              <a:spcAft>
-                <a:spcPts val="200"/>
-              </a:spcAft>
-            </a:pPr>
-            <a:r>
-              <a:rPr sz="1100">
-                <a:solidFill>
-                  <a:srgbClr val="000000"/>
-                </a:solidFill>
-              </a:rPr>
-              <a:t>  Repo:    koundinyapappu-boop / ai-log-data-platform  (GitHub)</a:t>
-            </a:r>
-          </a:p>
-          <a:p>
-            <a:pPr lvl="1">
-              <a:spcAft>
-                <a:spcPts val="200"/>
-              </a:spcAft>
-            </a:pPr>
-            <a:r>
-              <a:rPr sz="1100">
-                <a:solidFill>
-                  <a:srgbClr val="000000"/>
-                </a:solidFill>
-              </a:rPr>
-              <a:t>  Branch:  claude/affectionate-lovelace-519pwf</a:t>
-            </a:r>
-          </a:p>
-          <a:p>
-            <a:pPr lvl="1">
-              <a:spcAft>
-                <a:spcPts val="200"/>
-              </a:spcAft>
-            </a:pPr>
-            <a:r>
-              <a:rPr sz="1100">
-                <a:solidFill>
-                  <a:srgbClr val="000000"/>
-                </a:solidFill>
-              </a:rPr>
-              <a:t>  All work committed and pushed — 15 files, ~5,500 lines of SQL / PySpark / JSON / Bicep</a:t>
-            </a:r>
-          </a:p>
-          <a:p>
-            <a:pPr>
-              <a:spcAft>
-                <a:spcPts val="200"/>
-              </a:spcAft>
-            </a:pPr>
-            <a:r>
-              <a:rPr sz="1200">
-                <a:solidFill>
-                  <a:srgbClr val="000000"/>
-                </a:solidFill>
-              </a:rPr>
-              <a:t/>
+              <a:t>Project File Structure</a:t>
+            </a:r>
+          </a:p>
+          <a:p>
+            <a:pPr>
+              <a:spcAft>
+                <a:spcPts val="100"/>
+              </a:spcAft>
+            </a:pPr>
+            <a:r>
+              <a:rPr sz="1100">
+                <a:solidFill>
+                  <a:srgbClr val="000000"/>
+                </a:solidFill>
+              </a:rPr>
+              <a:t>  •  migrations/           5 versioned DDL scripts (001 Bronze → 005 Gold)</a:t>
+            </a:r>
+          </a:p>
+          <a:p>
+            <a:pPr>
+              <a:spcAft>
+                <a:spcPts val="100"/>
+              </a:spcAft>
+            </a:pPr>
+            <a:r>
+              <a:rPr sz="1100">
+                <a:solidFill>
+                  <a:srgbClr val="000000"/>
+                </a:solidFill>
+              </a:rPr>
+              <a:t>  •  lakehouse/bronze/     Event Hubs ingestion notebook + 15-min schedule pipeline</a:t>
+            </a:r>
+          </a:p>
+          <a:p>
+            <a:pPr>
+              <a:spcAft>
+                <a:spcPts val="100"/>
+              </a:spcAft>
+            </a:pPr>
+            <a:r>
+              <a:rPr sz="1100">
+                <a:solidFill>
+                  <a:srgbClr val="000000"/>
+                </a:solidFill>
+              </a:rPr>
+              <a:t>  •  lakehouse/silver/     Transform notebooks (transactions &amp; auth) + parallel pipeline</a:t>
+            </a:r>
+          </a:p>
+          <a:p>
+            <a:pPr>
+              <a:spcAft>
+                <a:spcPts val="100"/>
+              </a:spcAft>
+            </a:pPr>
+            <a:r>
+              <a:rPr sz="1100">
+                <a:solidFill>
+                  <a:srgbClr val="000000"/>
+                </a:solidFill>
+              </a:rPr>
+              <a:t>  •  lakehouse/gold/       Fact build + aggregate notebooks + Gold pipeline</a:t>
+            </a:r>
+          </a:p>
+          <a:p>
+            <a:pPr>
+              <a:spcAft>
+                <a:spcPts val="100"/>
+              </a:spcAft>
+            </a:pPr>
+            <a:r>
+              <a:rPr sz="1100">
+                <a:solidFill>
+                  <a:srgbClr val="000000"/>
+                </a:solidFill>
+              </a:rPr>
+              <a:t>  •  lakehouse/pipelines/  Master orchestrator (Bronze → Silver → Gold sequence)</a:t>
+            </a:r>
+          </a:p>
+          <a:p>
+            <a:pPr>
+              <a:spcAft>
+                <a:spcPts val="100"/>
+              </a:spcAft>
+            </a:pPr>
+            <a:r>
+              <a:rPr sz="1100">
+                <a:solidFill>
+                  <a:srgbClr val="000000"/>
+                </a:solidFill>
+              </a:rPr>
+              <a:t>  •  infra/bicep/          main.bicep — full Azure environment Infrastructure-as-Code</a:t>
+            </a:r>
+          </a:p>
+          <a:p>
+            <a:pPr>
+              <a:spcAft>
+                <a:spcPts val="100"/>
+              </a:spcAft>
+            </a:pPr>
+            <a:r>
+              <a:rPr sz="1100">
+                <a:solidFill>
+                  <a:srgbClr val="000000"/>
+                </a:solidFill>
+              </a:rPr>
+              <a:t>  •  docs/                 ER diagram (Mermaid), data dictionary, project summary, this deck</a:t>
+            </a:r>
+          </a:p>
+          <a:p>
+            <a:pPr>
+              <a:spcAft>
+                <a:spcPts val="100"/>
+              </a:spcAft>
+            </a:pPr>
+            <a:r>
+              <a:rPr sz="600"/>
+              <a:t> </a:t>
             </a:r>
           </a:p>
           <a:p>
             <a:pPr>
               <a:spcBef>
-                <a:spcPts val="1000"/>
+                <a:spcPts val="800"/>
               </a:spcBef>
               <a:spcAft>
-                <a:spcPts val="200"/>
-              </a:spcAft>
-            </a:pPr>
-            <a:r>
-              <a:rPr sz="1500" b="1">
+                <a:spcPts val="100"/>
+              </a:spcAft>
+            </a:pPr>
+            <a:r>
+              <a:rPr sz="1400" b="1">
                 <a:solidFill>
                   <a:srgbClr val="006BFF"/>
                 </a:solidFill>
               </a:rPr>
-              <a:t>Project File Structure</a:t>
-            </a:r>
-          </a:p>
-          <a:p>
-            <a:pPr lvl="1">
-              <a:spcAft>
-                <a:spcPts val="200"/>
-              </a:spcAft>
-            </a:pPr>
-            <a:r>
-              <a:rPr sz="1100">
-                <a:solidFill>
-                  <a:srgbClr val="000000"/>
-                </a:solidFill>
-              </a:rPr>
-              <a:t>  migrations/         5 versioned DDL scripts (Bronze → Silver → Gold)</a:t>
-            </a:r>
-          </a:p>
-          <a:p>
-            <a:pPr lvl="1">
-              <a:spcAft>
-                <a:spcPts val="200"/>
-              </a:spcAft>
-            </a:pPr>
-            <a:r>
-              <a:rPr sz="1100">
-                <a:solidFill>
-                  <a:srgbClr val="000000"/>
-                </a:solidFill>
-              </a:rPr>
-              <a:t>  lakehouse/bronze/   Event Hubs ingestion notebook + 15-min schedule pipeline</a:t>
-            </a:r>
-          </a:p>
-          <a:p>
-            <a:pPr lvl="1">
-              <a:spcAft>
-                <a:spcPts val="200"/>
-              </a:spcAft>
-            </a:pPr>
-            <a:r>
-              <a:rPr sz="1100">
-                <a:solidFill>
-                  <a:srgbClr val="000000"/>
-                </a:solidFill>
-              </a:rPr>
-              <a:t>  lakehouse/silver/   Transform notebooks (transactions, auth) + parallel pipeline</a:t>
-            </a:r>
-          </a:p>
-          <a:p>
-            <a:pPr lvl="1">
-              <a:spcAft>
-                <a:spcPts val="200"/>
-              </a:spcAft>
-            </a:pPr>
-            <a:r>
-              <a:rPr sz="1100">
-                <a:solidFill>
-                  <a:srgbClr val="000000"/>
-                </a:solidFill>
-              </a:rPr>
-              <a:t>  lakehouse/gold/     Fact build + aggregate notebooks + Gold pipeline</a:t>
-            </a:r>
-          </a:p>
-          <a:p>
-            <a:pPr lvl="1">
-              <a:spcAft>
-                <a:spcPts val="200"/>
-              </a:spcAft>
-            </a:pPr>
-            <a:r>
-              <a:rPr sz="1100">
-                <a:solidFill>
-                  <a:srgbClr val="000000"/>
-                </a:solidFill>
-              </a:rPr>
-              <a:t>  lakehouse/pipelines/ Master orchestrator (Bronze → Silver → Gold sequence)</a:t>
-            </a:r>
-          </a:p>
-          <a:p>
-            <a:pPr lvl="1">
-              <a:spcAft>
-                <a:spcPts val="200"/>
-              </a:spcAft>
-            </a:pPr>
-            <a:r>
-              <a:rPr sz="1100">
-                <a:solidFill>
-                  <a:srgbClr val="000000"/>
-                </a:solidFill>
-              </a:rPr>
-              <a:t>  infra/bicep/        main.bicep — full Azure environment IaC</a:t>
-            </a:r>
-          </a:p>
-          <a:p>
-            <a:pPr lvl="1">
-              <a:spcAft>
-                <a:spcPts val="200"/>
-              </a:spcAft>
-            </a:pPr>
-            <a:r>
-              <a:rPr sz="1100">
-                <a:solidFill>
-                  <a:srgbClr val="000000"/>
-                </a:solidFill>
-              </a:rPr>
-              <a:t>  docs/               ER diagram (Mermaid), data dictionary, project summary</a:t>
-            </a:r>
-          </a:p>
-          <a:p>
-            <a:pPr>
-              <a:spcAft>
-                <a:spcPts val="200"/>
-              </a:spcAft>
-            </a:pPr>
-            <a:r>
-              <a:rPr sz="1200">
-                <a:solidFill>
-                  <a:srgbClr val="000000"/>
-                </a:solidFill>
-              </a:rPr>
-              <a:t/>
+              <a:t>Development Platform</a:t>
+            </a:r>
+          </a:p>
+          <a:p>
+            <a:pPr>
+              <a:spcAft>
+                <a:spcPts val="100"/>
+              </a:spcAft>
+            </a:pPr>
+            <a:r>
+              <a:rPr sz="1100">
+                <a:solidFill>
+                  <a:srgbClr val="000000"/>
+                </a:solidFill>
+              </a:rPr>
+              <a:t>  •  IDE: Claude Code (remote cloud session)</a:t>
+            </a:r>
+          </a:p>
+          <a:p>
+            <a:pPr>
+              <a:spcAft>
+                <a:spcPts val="100"/>
+              </a:spcAft>
+            </a:pPr>
+            <a:r>
+              <a:rPr sz="1100">
+                <a:solidFill>
+                  <a:srgbClr val="000000"/>
+                </a:solidFill>
+              </a:rPr>
+              <a:t>  •  CI/CD: Synapse Pipeline triggers (Schedule: every 15 min for Bronze ingestion)</a:t>
+            </a:r>
+          </a:p>
+          <a:p>
+            <a:pPr>
+              <a:spcAft>
+                <a:spcPts val="100"/>
+              </a:spcAft>
+            </a:pPr>
+            <a:r>
+              <a:rPr sz="1100">
+                <a:solidFill>
+                  <a:srgbClr val="000000"/>
+                </a:solidFill>
+              </a:rPr>
+              <a:t>  •  Secrets: All credentials via mssparkutils.credentials.getSecret — never hardcoded</a:t>
+            </a:r>
+          </a:p>
+          <a:p>
+            <a:pPr>
+              <a:spcAft>
+                <a:spcPts val="100"/>
+              </a:spcAft>
+            </a:pPr>
+            <a:r>
+              <a:rPr sz="600"/>
+              <a:t> </a:t>
             </a:r>
           </a:p>
           <a:p>
             <a:pPr>
               <a:spcBef>
-                <a:spcPts val="1000"/>
+                <a:spcPts val="800"/>
               </a:spcBef>
               <a:spcAft>
-                <a:spcPts val="200"/>
-              </a:spcAft>
-            </a:pPr>
-            <a:r>
-              <a:rPr sz="1500" b="1">
+                <a:spcPts val="100"/>
+              </a:spcAft>
+            </a:pPr>
+            <a:r>
+              <a:rPr sz="1400" b="1">
                 <a:solidFill>
                   <a:srgbClr val="006BFF"/>
                 </a:solidFill>
               </a:rPr>
-              <a:t>Development Platform</a:t>
-            </a:r>
-          </a:p>
-          <a:p>
-            <a:pPr lvl="1">
-              <a:spcAft>
-                <a:spcPts val="200"/>
-              </a:spcAft>
-            </a:pPr>
-            <a:r>
-              <a:rPr sz="1100">
-                <a:solidFill>
-                  <a:srgbClr val="000000"/>
-                </a:solidFill>
-              </a:rPr>
-              <a:t>  IDE:       Claude Code (remote session, cloud-hosted container)</a:t>
-            </a:r>
-          </a:p>
-          <a:p>
-            <a:pPr lvl="1">
-              <a:spcAft>
-                <a:spcPts val="200"/>
-              </a:spcAft>
-            </a:pPr>
-            <a:r>
-              <a:rPr sz="1100">
-                <a:solidFill>
-                  <a:srgbClr val="000000"/>
-                </a:solidFill>
-              </a:rPr>
-              <a:t>  IaC:       Bicep — deploys Synapse, ADLS, Event Hubs, Key Vault, OpenAI</a:t>
-            </a:r>
-          </a:p>
-          <a:p>
-            <a:pPr lvl="1">
-              <a:spcAft>
-                <a:spcPts val="200"/>
-              </a:spcAft>
-            </a:pPr>
-            <a:r>
-              <a:rPr sz="1100">
-                <a:solidFill>
-                  <a:srgbClr val="000000"/>
-                </a:solidFill>
-              </a:rPr>
-              <a:t>  CI/CD:     Synapse Pipeline triggers (Schedule: every 15 min for Bronze)</a:t>
-            </a:r>
-          </a:p>
-          <a:p>
-            <a:pPr lvl="1">
-              <a:spcAft>
-                <a:spcPts val="200"/>
-              </a:spcAft>
-            </a:pPr>
-            <a:r>
-              <a:rPr sz="1100">
-                <a:solidFill>
-                  <a:srgbClr val="000000"/>
-                </a:solidFill>
-              </a:rPr>
-              <a:t>  Secrets:   All credentials via mssparkutils.credentials.getSecret — never hardcoded</a:t>
-            </a:r>
-          </a:p>
-          <a:p>
-            <a:pPr>
-              <a:spcAft>
-                <a:spcPts val="200"/>
-              </a:spcAft>
-            </a:pPr>
-            <a:r>
-              <a:rPr sz="1200">
-                <a:solidFill>
-                  <a:srgbClr val="000000"/>
-                </a:solidFill>
-              </a:rPr>
-              <a:t/>
-            </a:r>
-          </a:p>
-          <a:p>
-            <a:pPr>
-              <a:spcBef>
-                <a:spcPts val="1000"/>
-              </a:spcBef>
-              <a:spcAft>
-                <a:spcPts val="200"/>
-              </a:spcAft>
-            </a:pPr>
-            <a:r>
-              <a:rPr sz="1500" b="1">
-                <a:solidFill>
-                  <a:srgbClr val="006BFF"/>
-                </a:solidFill>
-              </a:rPr>
-              <a:t>Branching &amp; Commit Strategy</a:t>
-            </a:r>
-          </a:p>
-          <a:p>
-            <a:pPr lvl="1">
-              <a:spcAft>
-                <a:spcPts val="200"/>
-              </a:spcAft>
-            </a:pPr>
-            <a:r>
-              <a:rPr sz="1100">
-                <a:solidFill>
-                  <a:srgbClr val="000000"/>
-                </a:solidFill>
-              </a:rPr>
-              <a:t>  Feature branch per session — merged to main via PR</a:t>
-            </a:r>
-          </a:p>
-          <a:p>
-            <a:pPr lvl="1">
-              <a:spcAft>
-                <a:spcPts val="200"/>
-              </a:spcAft>
-            </a:pPr>
-            <a:r>
-              <a:rPr sz="1100">
-                <a:solidFill>
-                  <a:srgbClr val="000000"/>
-                </a:solidFill>
-              </a:rPr>
-              <a:t>  Commit messages follow conventional format with scope (feat, fix, docs)</a:t>
-            </a:r>
-          </a:p>
-          <a:p>
-            <a:pPr lvl="1">
-              <a:spcAft>
-                <a:spcPts val="200"/>
-              </a:spcAft>
-            </a:pPr>
-            <a:r>
-              <a:rPr sz="1100">
-                <a:solidFill>
-                  <a:srgbClr val="000000"/>
-                </a:solidFill>
-              </a:rPr>
-              <a:t>  Migrations are additive-only — no ALTER/DROP on existing tables</a:t>
+              <a:t>Commit &amp; Branching Strategy</a:t>
+            </a:r>
+          </a:p>
+          <a:p>
+            <a:pPr>
+              <a:spcAft>
+                <a:spcPts val="100"/>
+              </a:spcAft>
+            </a:pPr>
+            <a:r>
+              <a:rPr sz="1100">
+                <a:solidFill>
+                  <a:srgbClr val="000000"/>
+                </a:solidFill>
+              </a:rPr>
+              <a:t>  •  Feature branch per session — merged to main via Pull Request</a:t>
+            </a:r>
+          </a:p>
+          <a:p>
+            <a:pPr>
+              <a:spcAft>
+                <a:spcPts val="100"/>
+              </a:spcAft>
+            </a:pPr>
+            <a:r>
+              <a:rPr sz="1100">
+                <a:solidFill>
+                  <a:srgbClr val="000000"/>
+                </a:solidFill>
+              </a:rPr>
+              <a:t>  •  Commit messages follow conventional format with scope (feat, fix, docs, migration)</a:t>
+            </a:r>
+          </a:p>
+          <a:p>
+            <a:pPr>
+              <a:spcAft>
+                <a:spcPts val="100"/>
+              </a:spcAft>
+            </a:pPr>
+            <a:r>
+              <a:rPr sz="1100">
+                <a:solidFill>
+                  <a:srgbClr val="000000"/>
+                </a:solidFill>
+              </a:rPr>
+              <a:t>  •  Migrations are additive-only — no ALTER TABLE / DROP on existing tables</a:t>
             </a:r>
           </a:p>
         </p:txBody>
@@ -5571,16 +4669,40 @@
         <p:nvPr/>
       </p:nvGrpSpPr>
       <p:grpSpPr/>
-      <p:sp>
-        <p:nvSpPr>
-          <p:cNvPr id="2" name="TextBox 1"/>
+      <p:pic>
+        <p:nvPicPr>
+          <p:cNvPr id="2" name="Picture 1" descr="image3.png"/>
+          <p:cNvPicPr>
+            <a:picLocks noChangeAspect="1"/>
+          </p:cNvPicPr>
+          <p:nvPr/>
+        </p:nvPicPr>
+        <p:blipFill>
+          <a:blip r:embed="rId2"/>
+          <a:stretch>
+            <a:fillRect/>
+          </a:stretch>
+        </p:blipFill>
+        <p:spPr>
+          <a:xfrm>
+            <a:off x="0" y="0"/>
+            <a:ext cx="12188952" cy="6858000"/>
+          </a:xfrm>
+          <a:prstGeom prst="rect">
+            <a:avLst/>
+          </a:prstGeom>
+        </p:spPr>
+      </p:pic>
+      <p:sp>
+        <p:nvSpPr>
+          <p:cNvPr id="3" name="TextBox 2"/>
           <p:cNvSpPr txBox="1"/>
           <p:nvPr/>
         </p:nvSpPr>
         <p:spPr>
           <a:xfrm>
-            <a:off x="228600" y="91440"/>
-            <a:ext cx="3657600" cy="274320"/>
+            <a:off x="457200" y="201168"/>
+            <a:ext cx="11247120" cy="777240"/>
           </a:xfrm>
           <a:prstGeom prst="rect">
             <a:avLst/>
@@ -5595,26 +4717,26 @@
           <a:p>
             <a:pPr algn="l"/>
             <a:r>
-              <a:rPr sz="900" b="0" i="0">
-                <a:solidFill>
-                  <a:srgbClr val="00B050"/>
-                </a:solidFill>
-              </a:rPr>
-              <a:t>Classification: Internal</a:t>
-            </a:r>
-          </a:p>
-        </p:txBody>
-      </p:sp>
-      <p:sp>
-        <p:nvSpPr>
-          <p:cNvPr id="3" name="TextBox 2"/>
+              <a:rPr sz="3000" b="1" i="0">
+                <a:solidFill>
+                  <a:srgbClr val="000000"/>
+                </a:solidFill>
+              </a:rPr>
+              <a:t>Data Model &amp; DDL</a:t>
+            </a:r>
+          </a:p>
+        </p:txBody>
+      </p:sp>
+      <p:sp>
+        <p:nvSpPr>
+          <p:cNvPr id="4" name="TextBox 3"/>
           <p:cNvSpPr txBox="1"/>
           <p:nvPr/>
         </p:nvSpPr>
         <p:spPr>
           <a:xfrm>
-            <a:off x="228600" y="6492240"/>
-            <a:ext cx="4572000" cy="274320"/>
+            <a:off x="502920" y="1325880"/>
+            <a:ext cx="11155680" cy="5212080"/>
           </a:xfrm>
           <a:prstGeom prst="rect">
             <a:avLst/>
@@ -5627,553 +4749,362 @@
           </a:bodyPr>
           <a:lstStyle/>
           <a:p>
-            <a:pPr algn="l"/>
-            <a:r>
-              <a:rPr sz="800" b="0" i="0">
-                <a:solidFill>
-                  <a:srgbClr val="666666"/>
-                </a:solidFill>
-              </a:rPr>
-              <a:t>Copyright © 2025 HCLTech | Confidential</a:t>
-            </a:r>
-          </a:p>
-        </p:txBody>
-      </p:sp>
-      <p:sp>
-        <p:nvSpPr>
-          <p:cNvPr id="4" name="TextBox 3"/>
-          <p:cNvSpPr txBox="1"/>
-          <p:nvPr/>
-        </p:nvSpPr>
-        <p:spPr>
-          <a:xfrm>
-            <a:off x="10543032" y="6446520"/>
-            <a:ext cx="1463040" cy="320040"/>
-          </a:xfrm>
-          <a:prstGeom prst="rect">
-            <a:avLst/>
-          </a:prstGeom>
-          <a:noFill/>
-        </p:spPr>
-        <p:txBody>
-          <a:bodyPr wrap="square">
-            <a:spAutoFit/>
-          </a:bodyPr>
-          <a:lstStyle/>
-          <a:p>
-            <a:pPr algn="r"/>
-            <a:r>
-              <a:rPr sz="1400" b="1" i="0">
+            <a:pPr>
+              <a:spcBef>
+                <a:spcPts val="800"/>
+              </a:spcBef>
+              <a:spcAft>
+                <a:spcPts val="100"/>
+              </a:spcAft>
+            </a:pPr>
+            <a:r>
+              <a:rPr sz="1400" b="1">
                 <a:solidFill>
                   <a:srgbClr val="006BFF"/>
                 </a:solidFill>
               </a:rPr>
-              <a:t>HCLTech</a:t>
-            </a:r>
-          </a:p>
-        </p:txBody>
-      </p:sp>
-      <p:sp>
-        <p:nvSpPr>
-          <p:cNvPr id="5" name="TextBox 4"/>
-          <p:cNvSpPr txBox="1"/>
-          <p:nvPr/>
-        </p:nvSpPr>
-        <p:spPr>
-          <a:xfrm>
-            <a:off x="457200" y="228600"/>
-            <a:ext cx="10972800" cy="777240"/>
-          </a:xfrm>
-          <a:prstGeom prst="rect">
-            <a:avLst/>
-          </a:prstGeom>
-          <a:noFill/>
-        </p:spPr>
-        <p:txBody>
-          <a:bodyPr wrap="square">
-            <a:spAutoFit/>
-          </a:bodyPr>
-          <a:lstStyle/>
-          <a:p>
-            <a:pPr algn="l"/>
-            <a:r>
-              <a:rPr sz="3200" b="1" i="0">
-                <a:solidFill>
-                  <a:srgbClr val="000000"/>
-                </a:solidFill>
-              </a:rPr>
-              <a:t>Data Model &amp; DDL</a:t>
-            </a:r>
-          </a:p>
-        </p:txBody>
-      </p:sp>
-      <p:sp>
-        <p:nvSpPr>
-          <p:cNvPr id="6" name="Rectangle 5"/>
-          <p:cNvSpPr/>
-          <p:nvPr/>
-        </p:nvSpPr>
-        <p:spPr>
-          <a:xfrm>
-            <a:off x="457200" y="1097280"/>
-            <a:ext cx="11247120" cy="27432"/>
-          </a:xfrm>
-          <a:prstGeom prst="rect">
-            <a:avLst/>
-          </a:prstGeom>
-          <a:solidFill>
-            <a:srgbClr val="006BFF"/>
-          </a:solidFill>
-          <a:ln>
-            <a:noFill/>
-          </a:ln>
-        </p:spPr>
-        <p:style>
-          <a:lnRef idx="1">
-            <a:schemeClr val="accent1"/>
-          </a:lnRef>
-          <a:fillRef idx="3">
-            <a:schemeClr val="accent1"/>
-          </a:fillRef>
-          <a:effectRef idx="2">
-            <a:schemeClr val="accent1"/>
-          </a:effectRef>
-          <a:fontRef idx="minor">
-            <a:schemeClr val="lt1"/>
-          </a:fontRef>
-        </p:style>
-        <p:txBody>
-          <a:bodyPr rtlCol="0" anchor="ctr"/>
-          <a:lstStyle/>
-          <a:p>
-            <a:pPr algn="ctr"/>
-          </a:p>
-        </p:txBody>
-      </p:sp>
-      <p:sp>
-        <p:nvSpPr>
-          <p:cNvPr id="7" name="TextBox 6"/>
-          <p:cNvSpPr txBox="1"/>
-          <p:nvPr/>
-        </p:nvSpPr>
-        <p:spPr>
-          <a:xfrm>
-            <a:off x="457200" y="1234440"/>
-            <a:ext cx="11247120" cy="5212080"/>
-          </a:xfrm>
-          <a:prstGeom prst="rect">
-            <a:avLst/>
-          </a:prstGeom>
-          <a:noFill/>
-        </p:spPr>
-        <p:txBody>
-          <a:bodyPr wrap="square">
-            <a:spAutoFit/>
-          </a:bodyPr>
-          <a:lstStyle/>
+              <a:t>26 Banking Domain Tables Across 3 Layers</a:t>
+            </a:r>
+          </a:p>
+          <a:p>
+            <a:pPr>
+              <a:spcAft>
+                <a:spcPts val="100"/>
+              </a:spcAft>
+            </a:pPr>
+            <a:r>
+              <a:rPr sz="1100">
+                <a:solidFill>
+                  <a:srgbClr val="000000"/>
+                </a:solidFill>
+              </a:rPr>
+              <a:t>  •  Bronze (6):  transaction_logs, auth_logs, api_gateway_logs, app_error_logs, audit_logs, fraud_alert_logs</a:t>
+            </a:r>
+          </a:p>
+          <a:p>
+            <a:pPr>
+              <a:spcAft>
+                <a:spcPts val="100"/>
+              </a:spcAft>
+            </a:pPr>
+            <a:r>
+              <a:rPr sz="1100">
+                <a:solidFill>
+                  <a:srgbClr val="000000"/>
+                </a:solidFill>
+              </a:rPr>
+              <a:t>  •  Silver (14): 8 conformed dimensions (SCD2) + 6 normalised fact tables (3NF)</a:t>
+            </a:r>
+          </a:p>
+          <a:p>
+            <a:pPr>
+              <a:spcAft>
+                <a:spcPts val="100"/>
+              </a:spcAft>
+            </a:pPr>
+            <a:r>
+              <a:rPr sz="1100">
+                <a:solidFill>
+                  <a:srgbClr val="000000"/>
+                </a:solidFill>
+              </a:rPr>
+              <a:t>  •  Gold (14):   6 dims + 3 star-schema facts + 2 pre-aggregates + 3 AI enrichment tables</a:t>
+            </a:r>
+          </a:p>
+          <a:p>
+            <a:pPr>
+              <a:spcAft>
+                <a:spcPts val="100"/>
+              </a:spcAft>
+            </a:pPr>
+            <a:r>
+              <a:rPr sz="600"/>
+              <a:t> </a:t>
+            </a:r>
+          </a:p>
           <a:p>
             <a:pPr>
               <a:spcBef>
-                <a:spcPts val="1000"/>
+                <a:spcPts val="800"/>
               </a:spcBef>
               <a:spcAft>
-                <a:spcPts val="200"/>
-              </a:spcAft>
-            </a:pPr>
-            <a:r>
-              <a:rPr sz="1500" b="1">
+                <a:spcPts val="100"/>
+              </a:spcAft>
+            </a:pPr>
+            <a:r>
+              <a:rPr sz="1400" b="1">
                 <a:solidFill>
                   <a:srgbClr val="006BFF"/>
                 </a:solidFill>
               </a:rPr>
-              <a:t>Banking Domain Entities — 26 Tables Across 3 Layers</a:t>
-            </a:r>
-          </a:p>
-          <a:p>
-            <a:pPr lvl="1">
-              <a:spcAft>
-                <a:spcPts val="200"/>
-              </a:spcAft>
-            </a:pPr>
-            <a:r>
-              <a:rPr sz="1100">
-                <a:solidFill>
-                  <a:srgbClr val="000000"/>
-                </a:solidFill>
-              </a:rPr>
-              <a:t>  Bronze (6):   brz_transaction_logs, brz_auth_logs, brz_api_gateway_logs,</a:t>
-            </a:r>
-          </a:p>
-          <a:p>
-            <a:pPr>
-              <a:spcAft>
-                <a:spcPts val="200"/>
-              </a:spcAft>
-            </a:pPr>
-            <a:r>
-              <a:rPr sz="1200">
-                <a:solidFill>
-                  <a:srgbClr val="000000"/>
-                </a:solidFill>
-              </a:rPr>
-              <a:t>                  brz_application_error_logs, brz_audit_logs, brz_fraud_alert_logs</a:t>
-            </a:r>
-          </a:p>
-          <a:p>
-            <a:pPr lvl="1">
-              <a:spcAft>
-                <a:spcPts val="200"/>
-              </a:spcAft>
-            </a:pPr>
-            <a:r>
-              <a:rPr sz="1100">
-                <a:solidFill>
-                  <a:srgbClr val="000000"/>
-                </a:solidFill>
-              </a:rPr>
-              <a:t>  Silver (14):  8 conformed dimensions (SCD2) + 6 normalised fact tables</a:t>
-            </a:r>
-          </a:p>
-          <a:p>
-            <a:pPr lvl="1">
-              <a:spcAft>
-                <a:spcPts val="200"/>
-              </a:spcAft>
-            </a:pPr>
-            <a:r>
-              <a:rPr sz="1100">
-                <a:solidFill>
-                  <a:srgbClr val="000000"/>
-                </a:solidFill>
-              </a:rPr>
-              <a:t>  Gold (14):    6 dims + 3 star-schema facts + 2 aggregates + 3 AI tables</a:t>
-            </a:r>
-          </a:p>
-          <a:p>
-            <a:pPr>
-              <a:spcAft>
-                <a:spcPts val="200"/>
-              </a:spcAft>
-            </a:pPr>
-            <a:r>
-              <a:rPr sz="1200">
-                <a:solidFill>
-                  <a:srgbClr val="000000"/>
-                </a:solidFill>
-              </a:rPr>
-              <a:t/>
+              <a:t>Key Dimensions</a:t>
+            </a:r>
+          </a:p>
+          <a:p>
+            <a:pPr>
+              <a:spcAft>
+                <a:spcPts val="100"/>
+              </a:spcAft>
+            </a:pPr>
+            <a:r>
+              <a:rPr sz="1100">
+                <a:solidFill>
+                  <a:srgbClr val="000000"/>
+                </a:solidFill>
+              </a:rPr>
+              <a:t>  •  dim_account   — SCD2: account_type, product_code, risk_rating, AML_category</a:t>
+            </a:r>
+          </a:p>
+          <a:p>
+            <a:pPr>
+              <a:spcAft>
+                <a:spcPts val="100"/>
+              </a:spcAft>
+            </a:pPr>
+            <a:r>
+              <a:rPr sz="1100">
+                <a:solidFill>
+                  <a:srgbClr val="000000"/>
+                </a:solidFill>
+              </a:rPr>
+              <a:t>  •  dim_customer  — SCD2: segment (RETAIL / SME / CORPORATE), KYC status, risk_rating</a:t>
+            </a:r>
+          </a:p>
+          <a:p>
+            <a:pPr>
+              <a:spcAft>
+                <a:spcPts val="100"/>
+              </a:spcAft>
+            </a:pPr>
+            <a:r>
+              <a:rPr sz="1100">
+                <a:solidFill>
+                  <a:srgbClr val="000000"/>
+                </a:solidFill>
+              </a:rPr>
+              <a:t>  •  dim_channel   — DIGITAL / PHYSICAL / PARTNER (Mobile, ATM, Branch, API, USSD)</a:t>
+            </a:r>
+          </a:p>
+          <a:p>
+            <a:pPr>
+              <a:spcAft>
+                <a:spcPts val="100"/>
+              </a:spcAft>
+            </a:pPr>
+            <a:r>
+              <a:rPr sz="1100">
+                <a:solidFill>
+                  <a:srgbClr val="000000"/>
+                </a:solidFill>
+              </a:rPr>
+              <a:t>  •  dim_date      — Full fiscal calendar, bank holiday flags, relative date helpers</a:t>
+            </a:r>
+          </a:p>
+          <a:p>
+            <a:pPr>
+              <a:spcAft>
+                <a:spcPts val="100"/>
+              </a:spcAft>
+            </a:pPr>
+            <a:r>
+              <a:rPr sz="600"/>
+              <a:t> </a:t>
             </a:r>
           </a:p>
           <a:p>
             <a:pPr>
               <a:spcBef>
-                <a:spcPts val="1000"/>
+                <a:spcPts val="800"/>
               </a:spcBef>
               <a:spcAft>
-                <a:spcPts val="200"/>
-              </a:spcAft>
-            </a:pPr>
-            <a:r>
-              <a:rPr sz="1500" b="1">
+                <a:spcPts val="100"/>
+              </a:spcAft>
+            </a:pPr>
+            <a:r>
+              <a:rPr sz="1400" b="1">
                 <a:solidFill>
                   <a:srgbClr val="006BFF"/>
                 </a:solidFill>
               </a:rPr>
-              <a:t>Key Dimensions (Silver / Gold)</a:t>
-            </a:r>
-          </a:p>
-          <a:p>
-            <a:pPr lvl="1">
-              <a:spcAft>
-                <a:spcPts val="200"/>
-              </a:spcAft>
-            </a:pPr>
-            <a:r>
-              <a:rPr sz="1100">
-                <a:solidFill>
-                  <a:srgbClr val="000000"/>
-                </a:solidFill>
-              </a:rPr>
-              <a:t>  dim_account    — SCD2: account_type, product_code, risk_rating, AML_category</a:t>
-            </a:r>
-          </a:p>
-          <a:p>
-            <a:pPr lvl="1">
-              <a:spcAft>
-                <a:spcPts val="200"/>
-              </a:spcAft>
-            </a:pPr>
-            <a:r>
-              <a:rPr sz="1100">
-                <a:solidFill>
-                  <a:srgbClr val="000000"/>
-                </a:solidFill>
-              </a:rPr>
-              <a:t>  dim_customer   — SCD2: segment (RETAIL/SME/CORP), KYC status, risk rating</a:t>
-            </a:r>
-          </a:p>
-          <a:p>
-            <a:pPr lvl="1">
-              <a:spcAft>
-                <a:spcPts val="200"/>
-              </a:spcAft>
-            </a:pPr>
-            <a:r>
-              <a:rPr sz="1100">
-                <a:solidFill>
-                  <a:srgbClr val="000000"/>
-                </a:solidFill>
-              </a:rPr>
-              <a:t>  dim_channel    — DIGITAL / PHYSICAL / PARTNER (Mobile, ATM, Branch, API, USSD)</a:t>
-            </a:r>
-          </a:p>
-          <a:p>
-            <a:pPr lvl="1">
-              <a:spcAft>
-                <a:spcPts val="200"/>
-              </a:spcAft>
-            </a:pPr>
-            <a:r>
-              <a:rPr sz="1100">
-                <a:solidFill>
-                  <a:srgbClr val="000000"/>
-                </a:solidFill>
-              </a:rPr>
-              <a:t>  dim_date       — Full fiscal calendar, bank holiday flags, relative helpers</a:t>
-            </a:r>
-          </a:p>
-          <a:p>
-            <a:pPr lvl="1">
-              <a:spcAft>
-                <a:spcPts val="200"/>
-              </a:spcAft>
-            </a:pPr>
-            <a:r>
-              <a:rPr sz="1100">
-                <a:solidFill>
-                  <a:srgbClr val="000000"/>
-                </a:solidFill>
-              </a:rPr>
-              <a:t>  dim_service    — Microservice taxonomy, SLA tier, RTO/RPO, team owner</a:t>
-            </a:r>
-          </a:p>
-          <a:p>
-            <a:pPr>
-              <a:spcAft>
-                <a:spcPts val="200"/>
-              </a:spcAft>
-            </a:pPr>
-            <a:r>
-              <a:rPr sz="1200">
-                <a:solidFill>
-                  <a:srgbClr val="000000"/>
-                </a:solidFill>
-              </a:rPr>
-              <a:t/>
+              <a:t>Gold Star Schema Marts</a:t>
+            </a:r>
+          </a:p>
+          <a:p>
+            <a:pPr>
+              <a:spcAft>
+                <a:spcPts val="100"/>
+              </a:spcAft>
+            </a:pPr>
+            <a:r>
+              <a:rPr sz="1100">
+                <a:solidFill>
+                  <a:srgbClr val="000000"/>
+                </a:solidFill>
+              </a:rPr>
+              <a:t>  •  Transaction Analytics  → gld_fact_transaction_logs  (follow the money)</a:t>
+            </a:r>
+          </a:p>
+          <a:p>
+            <a:pPr>
+              <a:spcAft>
+                <a:spcPts val="100"/>
+              </a:spcAft>
+            </a:pPr>
+            <a:r>
+              <a:rPr sz="1100">
+                <a:solidFill>
+                  <a:srgbClr val="000000"/>
+                </a:solidFill>
+              </a:rPr>
+              <a:t>  •  Security &amp; Auth        → gld_fact_auth_events        (follow the access)</a:t>
+            </a:r>
+          </a:p>
+          <a:p>
+            <a:pPr>
+              <a:spcAft>
+                <a:spcPts val="100"/>
+              </a:spcAft>
+            </a:pPr>
+            <a:r>
+              <a:rPr sz="1100">
+                <a:solidFill>
+                  <a:srgbClr val="000000"/>
+                </a:solidFill>
+              </a:rPr>
+              <a:t>  •  Application Health     → gld_fact_application_errors (follow the failures)</a:t>
+            </a:r>
+          </a:p>
+          <a:p>
+            <a:pPr>
+              <a:spcAft>
+                <a:spcPts val="100"/>
+              </a:spcAft>
+            </a:pPr>
+            <a:r>
+              <a:rPr sz="600"/>
+              <a:t> </a:t>
             </a:r>
           </a:p>
           <a:p>
             <a:pPr>
               <a:spcBef>
-                <a:spcPts val="1000"/>
+                <a:spcPts val="800"/>
               </a:spcBef>
               <a:spcAft>
-                <a:spcPts val="200"/>
-              </a:spcAft>
-            </a:pPr>
-            <a:r>
-              <a:rPr sz="1500" b="1">
+                <a:spcPts val="100"/>
+              </a:spcAft>
+            </a:pPr>
+            <a:r>
+              <a:rPr sz="1400" b="1">
                 <a:solidFill>
                   <a:srgbClr val="006BFF"/>
                 </a:solidFill>
               </a:rPr>
-              <a:t>Gold Star Schema Marts</a:t>
-            </a:r>
-          </a:p>
-          <a:p>
-            <a:pPr lvl="1">
-              <a:spcAft>
-                <a:spcPts val="200"/>
-              </a:spcAft>
-            </a:pPr>
-            <a:r>
-              <a:rPr sz="1100">
-                <a:solidFill>
-                  <a:srgbClr val="000000"/>
-                </a:solidFill>
-              </a:rPr>
-              <a:t>  Transaction Analytics Mart  → gld_fact_transaction_logs  (follow the money)</a:t>
-            </a:r>
-          </a:p>
-          <a:p>
-            <a:pPr lvl="1">
-              <a:spcAft>
-                <a:spcPts val="200"/>
-              </a:spcAft>
-            </a:pPr>
-            <a:r>
-              <a:rPr sz="1100">
-                <a:solidFill>
-                  <a:srgbClr val="000000"/>
-                </a:solidFill>
-              </a:rPr>
-              <a:t>  Security &amp; Auth Mart        → gld_fact_auth_events        (follow the access)</a:t>
-            </a:r>
-          </a:p>
-          <a:p>
-            <a:pPr lvl="1">
-              <a:spcAft>
-                <a:spcPts val="200"/>
-              </a:spcAft>
-            </a:pPr>
-            <a:r>
-              <a:rPr sz="1100">
-                <a:solidFill>
-                  <a:srgbClr val="000000"/>
-                </a:solidFill>
-              </a:rPr>
-              <a:t>  Application Health Mart     → gld_fact_application_errors (follow the failures)</a:t>
-            </a:r>
-          </a:p>
-          <a:p>
-            <a:pPr>
-              <a:spcAft>
-                <a:spcPts val="200"/>
-              </a:spcAft>
-            </a:pPr>
-            <a:r>
-              <a:rPr sz="1200">
-                <a:solidFill>
-                  <a:srgbClr val="000000"/>
-                </a:solidFill>
-              </a:rPr>
-              <a:t/>
+              <a:t>AI-Enriched Gold Columns</a:t>
+            </a:r>
+          </a:p>
+          <a:p>
+            <a:pPr>
+              <a:spcAft>
+                <a:spcPts val="100"/>
+              </a:spcAft>
+            </a:pPr>
+            <a:r>
+              <a:rPr sz="1100">
+                <a:solidFill>
+                  <a:srgbClr val="000000"/>
+                </a:solidFill>
+              </a:rPr>
+              <a:t>  •  is_anomaly (BOOL), anomaly_score FLOAT [0–1], ai_risk_label (NORMAL/SUSPICIOUS/HIGH_RISK)</a:t>
+            </a:r>
+          </a:p>
+          <a:p>
+            <a:pPr>
+              <a:spcAft>
+                <a:spcPts val="100"/>
+              </a:spcAft>
+            </a:pPr>
+            <a:r>
+              <a:rPr sz="1100">
+                <a:solidFill>
+                  <a:srgbClr val="000000"/>
+                </a:solidFill>
+              </a:rPr>
+              <a:t>  •  ai_fraud_score, ai_root_cause_hint (LLM-generated), ai_error_cluster_id</a:t>
+            </a:r>
+          </a:p>
+          <a:p>
+            <a:pPr>
+              <a:spcAft>
+                <a:spcPts val="100"/>
+              </a:spcAft>
+            </a:pPr>
+            <a:r>
+              <a:rPr sz="1100">
+                <a:solidFill>
+                  <a:srgbClr val="000000"/>
+                </a:solidFill>
+              </a:rPr>
+              <a:t>  •  gld_log_embeddings — 1536-dim vectors via Azure OpenAI text-embedding-3-small</a:t>
+            </a:r>
+          </a:p>
+          <a:p>
+            <a:pPr>
+              <a:spcAft>
+                <a:spcPts val="100"/>
+              </a:spcAft>
+            </a:pPr>
+            <a:r>
+              <a:rPr sz="600"/>
+              <a:t> </a:t>
             </a:r>
           </a:p>
           <a:p>
             <a:pPr>
               <a:spcBef>
-                <a:spcPts val="1000"/>
+                <a:spcPts val="800"/>
               </a:spcBef>
               <a:spcAft>
-                <a:spcPts val="200"/>
-              </a:spcAft>
-            </a:pPr>
-            <a:r>
-              <a:rPr sz="1500" b="1">
+                <a:spcPts val="100"/>
+              </a:spcAft>
+            </a:pPr>
+            <a:r>
+              <a:rPr sz="1400" b="1">
                 <a:solidFill>
                   <a:srgbClr val="006BFF"/>
                 </a:solidFill>
               </a:rPr>
-              <a:t>AI-Enriched Columns (Gold Layer)</a:t>
-            </a:r>
-          </a:p>
-          <a:p>
-            <a:pPr lvl="1">
-              <a:spcAft>
-                <a:spcPts val="200"/>
-              </a:spcAft>
-            </a:pPr>
-            <a:r>
-              <a:rPr sz="1100">
-                <a:solidFill>
-                  <a:srgbClr val="000000"/>
-                </a:solidFill>
-              </a:rPr>
-              <a:t>  is_anomaly (BOOL), anomaly_score (FLOAT 0–1), ai_risk_label (NORMAL/SUSPICIOUS/HIGH_RISK)</a:t>
-            </a:r>
-          </a:p>
-          <a:p>
-            <a:pPr lvl="1">
-              <a:spcAft>
-                <a:spcPts val="200"/>
-              </a:spcAft>
-            </a:pPr>
-            <a:r>
-              <a:rPr sz="1100">
-                <a:solidFill>
-                  <a:srgbClr val="000000"/>
-                </a:solidFill>
-              </a:rPr>
-              <a:t>  ai_fraud_score, ai_root_cause_hint (LLM-generated), ai_error_cluster_id</a:t>
-            </a:r>
-          </a:p>
-          <a:p>
-            <a:pPr lvl="1">
-              <a:spcAft>
-                <a:spcPts val="200"/>
-              </a:spcAft>
-            </a:pPr>
-            <a:r>
-              <a:rPr sz="1100">
-                <a:solidFill>
-                  <a:srgbClr val="000000"/>
-                </a:solidFill>
-              </a:rPr>
-              <a:t>  gld_log_embeddings — 1536-dim vectors (Azure OpenAI text-embedding-3-small)</a:t>
-            </a:r>
-          </a:p>
-          <a:p>
-            <a:pPr>
-              <a:spcAft>
-                <a:spcPts val="200"/>
-              </a:spcAft>
-            </a:pPr>
-            <a:r>
-              <a:rPr sz="1200">
-                <a:solidFill>
-                  <a:srgbClr val="000000"/>
-                </a:solidFill>
-              </a:rPr>
-              <a:t/>
-            </a:r>
-          </a:p>
-          <a:p>
-            <a:pPr>
-              <a:spcBef>
-                <a:spcPts val="1000"/>
-              </a:spcBef>
-              <a:spcAft>
-                <a:spcPts val="200"/>
-              </a:spcAft>
-            </a:pPr>
-            <a:r>
-              <a:rPr sz="1500" b="1">
-                <a:solidFill>
-                  <a:srgbClr val="006BFF"/>
-                </a:solidFill>
-              </a:rPr>
               <a:t>Compliance by Design</a:t>
             </a:r>
           </a:p>
           <a:p>
-            <a:pPr lvl="1">
-              <a:spcAft>
-                <a:spcPts val="200"/>
-              </a:spcAft>
-            </a:pPr>
-            <a:r>
-              <a:rPr sz="1100">
-                <a:solidFill>
-                  <a:srgbClr val="000000"/>
-                </a:solidFill>
-              </a:rPr>
-              <a:t>  PII masked at DDL level (last-4 account, email domain only, postcode prefix)</a:t>
-            </a:r>
-          </a:p>
-          <a:p>
-            <a:pPr lvl="1">
-              <a:spcAft>
-                <a:spcPts val="200"/>
-              </a:spcAft>
-            </a:pPr>
-            <a:r>
-              <a:rPr sz="1100">
-                <a:solidFill>
-                  <a:srgbClr val="000000"/>
-                </a:solidFill>
-              </a:rPr>
-              <a:t>  raw_log_id + batch_id preserved through all layers for full audit lineage</a:t>
+            <a:pPr>
+              <a:spcAft>
+                <a:spcPts val="100"/>
+              </a:spcAft>
+            </a:pPr>
+            <a:r>
+              <a:rPr sz="1100">
+                <a:solidFill>
+                  <a:srgbClr val="000000"/>
+                </a:solidFill>
+              </a:rPr>
+              <a:t>  •  PII masked at DDL level: last-4 account number, email domain only, postcode prefix</a:t>
+            </a:r>
+          </a:p>
+          <a:p>
+            <a:pPr>
+              <a:spcAft>
+                <a:spcPts val="100"/>
+              </a:spcAft>
+            </a:pPr>
+            <a:r>
+              <a:rPr sz="1100">
+                <a:solidFill>
+                  <a:srgbClr val="000000"/>
+                </a:solidFill>
+              </a:rPr>
+              <a:t>  •  raw_log_id + batch_id preserved through all layers — full audit lineage to source</a:t>
             </a:r>
           </a:p>
         </p:txBody>
@@ -6196,16 +5127,40 @@
         <p:nvPr/>
       </p:nvGrpSpPr>
       <p:grpSpPr/>
-      <p:sp>
-        <p:nvSpPr>
-          <p:cNvPr id="2" name="TextBox 1"/>
+      <p:pic>
+        <p:nvPicPr>
+          <p:cNvPr id="2" name="Picture 1" descr="image3.png"/>
+          <p:cNvPicPr>
+            <a:picLocks noChangeAspect="1"/>
+          </p:cNvPicPr>
+          <p:nvPr/>
+        </p:nvPicPr>
+        <p:blipFill>
+          <a:blip r:embed="rId2"/>
+          <a:stretch>
+            <a:fillRect/>
+          </a:stretch>
+        </p:blipFill>
+        <p:spPr>
+          <a:xfrm>
+            <a:off x="0" y="0"/>
+            <a:ext cx="12188952" cy="6858000"/>
+          </a:xfrm>
+          <a:prstGeom prst="rect">
+            <a:avLst/>
+          </a:prstGeom>
+        </p:spPr>
+      </p:pic>
+      <p:sp>
+        <p:nvSpPr>
+          <p:cNvPr id="3" name="TextBox 2"/>
           <p:cNvSpPr txBox="1"/>
           <p:nvPr/>
         </p:nvSpPr>
         <p:spPr>
           <a:xfrm>
-            <a:off x="228600" y="91440"/>
-            <a:ext cx="3657600" cy="274320"/>
+            <a:off x="457200" y="201168"/>
+            <a:ext cx="11247120" cy="777240"/>
           </a:xfrm>
           <a:prstGeom prst="rect">
             <a:avLst/>
@@ -6220,26 +5175,26 @@
           <a:p>
             <a:pPr algn="l"/>
             <a:r>
-              <a:rPr sz="900" b="0" i="0">
-                <a:solidFill>
-                  <a:srgbClr val="00B050"/>
-                </a:solidFill>
-              </a:rPr>
-              <a:t>Classification: Internal</a:t>
-            </a:r>
-          </a:p>
-        </p:txBody>
-      </p:sp>
-      <p:sp>
-        <p:nvSpPr>
-          <p:cNvPr id="3" name="TextBox 2"/>
+              <a:rPr sz="3000" b="1" i="0">
+                <a:solidFill>
+                  <a:srgbClr val="000000"/>
+                </a:solidFill>
+              </a:rPr>
+              <a:t>AI Working Journal</a:t>
+            </a:r>
+          </a:p>
+        </p:txBody>
+      </p:sp>
+      <p:sp>
+        <p:nvSpPr>
+          <p:cNvPr id="4" name="TextBox 3"/>
           <p:cNvSpPr txBox="1"/>
           <p:nvPr/>
         </p:nvSpPr>
         <p:spPr>
           <a:xfrm>
-            <a:off x="228600" y="6492240"/>
-            <a:ext cx="4572000" cy="274320"/>
+            <a:off x="502920" y="1325880"/>
+            <a:ext cx="11155680" cy="5212080"/>
           </a:xfrm>
           <a:prstGeom prst="rect">
             <a:avLst/>
@@ -6252,505 +5207,348 @@
           </a:bodyPr>
           <a:lstStyle/>
           <a:p>
-            <a:pPr algn="l"/>
-            <a:r>
-              <a:rPr sz="800" b="0" i="0">
-                <a:solidFill>
-                  <a:srgbClr val="666666"/>
-                </a:solidFill>
-              </a:rPr>
-              <a:t>Copyright © 2025 HCLTech | Confidential</a:t>
-            </a:r>
-          </a:p>
-        </p:txBody>
-      </p:sp>
-      <p:sp>
-        <p:nvSpPr>
-          <p:cNvPr id="4" name="TextBox 3"/>
-          <p:cNvSpPr txBox="1"/>
-          <p:nvPr/>
-        </p:nvSpPr>
-        <p:spPr>
-          <a:xfrm>
-            <a:off x="10543032" y="6446520"/>
-            <a:ext cx="1463040" cy="320040"/>
-          </a:xfrm>
-          <a:prstGeom prst="rect">
-            <a:avLst/>
-          </a:prstGeom>
-          <a:noFill/>
-        </p:spPr>
-        <p:txBody>
-          <a:bodyPr wrap="square">
-            <a:spAutoFit/>
-          </a:bodyPr>
-          <a:lstStyle/>
-          <a:p>
-            <a:pPr algn="r"/>
-            <a:r>
-              <a:rPr sz="1400" b="1" i="0">
+            <a:pPr>
+              <a:spcBef>
+                <a:spcPts val="800"/>
+              </a:spcBef>
+              <a:spcAft>
+                <a:spcPts val="100"/>
+              </a:spcAft>
+            </a:pPr>
+            <a:r>
+              <a:rPr sz="1400" b="1">
                 <a:solidFill>
                   <a:srgbClr val="006BFF"/>
                 </a:solidFill>
               </a:rPr>
-              <a:t>HCLTech</a:t>
-            </a:r>
-          </a:p>
-        </p:txBody>
-      </p:sp>
-      <p:sp>
-        <p:nvSpPr>
-          <p:cNvPr id="5" name="TextBox 4"/>
-          <p:cNvSpPr txBox="1"/>
-          <p:nvPr/>
-        </p:nvSpPr>
-        <p:spPr>
-          <a:xfrm>
-            <a:off x="457200" y="228600"/>
-            <a:ext cx="10972800" cy="777240"/>
-          </a:xfrm>
-          <a:prstGeom prst="rect">
-            <a:avLst/>
-          </a:prstGeom>
-          <a:noFill/>
-        </p:spPr>
-        <p:txBody>
-          <a:bodyPr wrap="square">
-            <a:spAutoFit/>
-          </a:bodyPr>
-          <a:lstStyle/>
-          <a:p>
-            <a:pPr algn="l"/>
-            <a:r>
-              <a:rPr sz="3200" b="1" i="0">
-                <a:solidFill>
-                  <a:srgbClr val="000000"/>
-                </a:solidFill>
-              </a:rPr>
-              <a:t>AI Working Journal</a:t>
-            </a:r>
-          </a:p>
-        </p:txBody>
-      </p:sp>
-      <p:sp>
-        <p:nvSpPr>
-          <p:cNvPr id="6" name="Rectangle 5"/>
-          <p:cNvSpPr/>
-          <p:nvPr/>
-        </p:nvSpPr>
-        <p:spPr>
-          <a:xfrm>
-            <a:off x="457200" y="1097280"/>
-            <a:ext cx="11247120" cy="27432"/>
-          </a:xfrm>
-          <a:prstGeom prst="rect">
-            <a:avLst/>
-          </a:prstGeom>
-          <a:solidFill>
-            <a:srgbClr val="006BFF"/>
-          </a:solidFill>
-          <a:ln>
-            <a:noFill/>
-          </a:ln>
-        </p:spPr>
-        <p:style>
-          <a:lnRef idx="1">
-            <a:schemeClr val="accent1"/>
-          </a:lnRef>
-          <a:fillRef idx="3">
-            <a:schemeClr val="accent1"/>
-          </a:fillRef>
-          <a:effectRef idx="2">
-            <a:schemeClr val="accent1"/>
-          </a:effectRef>
-          <a:fontRef idx="minor">
-            <a:schemeClr val="lt1"/>
-          </a:fontRef>
-        </p:style>
-        <p:txBody>
-          <a:bodyPr rtlCol="0" anchor="ctr"/>
-          <a:lstStyle/>
-          <a:p>
-            <a:pPr algn="ctr"/>
-          </a:p>
-        </p:txBody>
-      </p:sp>
-      <p:sp>
-        <p:nvSpPr>
-          <p:cNvPr id="7" name="TextBox 6"/>
-          <p:cNvSpPr txBox="1"/>
-          <p:nvPr/>
-        </p:nvSpPr>
-        <p:spPr>
-          <a:xfrm>
-            <a:off x="457200" y="1234440"/>
-            <a:ext cx="11247120" cy="5212080"/>
-          </a:xfrm>
-          <a:prstGeom prst="rect">
-            <a:avLst/>
-          </a:prstGeom>
-          <a:noFill/>
-        </p:spPr>
-        <p:txBody>
-          <a:bodyPr wrap="square">
-            <a:spAutoFit/>
-          </a:bodyPr>
-          <a:lstStyle/>
+              <a:t>AI Engine Components Built</a:t>
+            </a:r>
+          </a:p>
+          <a:p>
+            <a:pPr>
+              <a:spcAft>
+                <a:spcPts val="100"/>
+              </a:spcAft>
+            </a:pPr>
+            <a:r>
+              <a:rPr sz="1100">
+                <a:solidFill>
+                  <a:srgbClr val="000000"/>
+                </a:solidFill>
+              </a:rPr>
+              <a:t>  •  Anomaly Detection  — Z-score on amount &amp; response_time_ms (PySpark, Gold notebook)</a:t>
+            </a:r>
+          </a:p>
+          <a:p>
+            <a:pPr>
+              <a:spcAft>
+                <a:spcPts val="100"/>
+              </a:spcAft>
+            </a:pPr>
+            <a:r>
+              <a:rPr sz="1100">
+                <a:solidFill>
+                  <a:srgbClr val="000000"/>
+                </a:solidFill>
+              </a:rPr>
+              <a:t>  •  Classification     — ai_risk_label: NORMAL / SUSPICIOUS / HIGH_RISK (threshold-based)</a:t>
+            </a:r>
+          </a:p>
+          <a:p>
+            <a:pPr>
+              <a:spcAft>
+                <a:spcPts val="100"/>
+              </a:spcAft>
+            </a:pPr>
+            <a:r>
+              <a:rPr sz="1100">
+                <a:solidFill>
+                  <a:srgbClr val="000000"/>
+                </a:solidFill>
+              </a:rPr>
+              <a:t>  •  Fraud Scoring      — ai_fraud_score column wired for Azure ML model inference</a:t>
+            </a:r>
+          </a:p>
+          <a:p>
+            <a:pPr>
+              <a:spcAft>
+                <a:spcPts val="100"/>
+              </a:spcAft>
+            </a:pPr>
+            <a:r>
+              <a:rPr sz="1100">
+                <a:solidFill>
+                  <a:srgbClr val="000000"/>
+                </a:solidFill>
+              </a:rPr>
+              <a:t>  •  LLM Summarisation  — ai_root_cause_hint via Azure OpenAI GPT-4o (placeholder wired)</a:t>
+            </a:r>
+          </a:p>
+          <a:p>
+            <a:pPr>
+              <a:spcAft>
+                <a:spcPts val="100"/>
+              </a:spcAft>
+            </a:pPr>
+            <a:r>
+              <a:rPr sz="1100">
+                <a:solidFill>
+                  <a:srgbClr val="000000"/>
+                </a:solidFill>
+              </a:rPr>
+              <a:t>  •  Embeddings         — gld_log_embeddings: 1536-dim float array + topic cluster + L2 norm</a:t>
+            </a:r>
+          </a:p>
+          <a:p>
+            <a:pPr>
+              <a:spcAft>
+                <a:spcPts val="100"/>
+              </a:spcAft>
+            </a:pPr>
+            <a:r>
+              <a:rPr sz="600"/>
+              <a:t> </a:t>
+            </a:r>
+          </a:p>
           <a:p>
             <a:pPr>
               <a:spcBef>
-                <a:spcPts val="1000"/>
+                <a:spcPts val="800"/>
               </a:spcBef>
               <a:spcAft>
-                <a:spcPts val="200"/>
-              </a:spcAft>
-            </a:pPr>
-            <a:r>
-              <a:rPr sz="1500" b="1">
+                <a:spcPts val="100"/>
+              </a:spcAft>
+            </a:pPr>
+            <a:r>
+              <a:rPr sz="1400" b="1">
                 <a:solidFill>
                   <a:srgbClr val="006BFF"/>
                 </a:solidFill>
               </a:rPr>
-              <a:t>AI Engine Components Built</a:t>
-            </a:r>
-          </a:p>
-          <a:p>
-            <a:pPr lvl="1">
-              <a:spcAft>
-                <a:spcPts val="200"/>
-              </a:spcAft>
-            </a:pPr>
-            <a:r>
-              <a:rPr sz="1100">
-                <a:solidFill>
-                  <a:srgbClr val="000000"/>
-                </a:solidFill>
-              </a:rPr>
-              <a:t>  Anomaly Detection   — Z-score on amount &amp; response_time_ms (PySpark, Gold notebook)</a:t>
-            </a:r>
-          </a:p>
-          <a:p>
-            <a:pPr lvl="1">
-              <a:spcAft>
-                <a:spcPts val="200"/>
-              </a:spcAft>
-            </a:pPr>
-            <a:r>
-              <a:rPr sz="1100">
-                <a:solidFill>
-                  <a:srgbClr val="000000"/>
-                </a:solidFill>
-              </a:rPr>
-              <a:t>  Classification      — ai_risk_label: NORMAL / SUSPICIOUS / HIGH_RISK (threshold-based)</a:t>
-            </a:r>
-          </a:p>
-          <a:p>
-            <a:pPr lvl="1">
-              <a:spcAft>
-                <a:spcPts val="200"/>
-              </a:spcAft>
-            </a:pPr>
-            <a:r>
-              <a:rPr sz="1100">
-                <a:solidFill>
-                  <a:srgbClr val="000000"/>
-                </a:solidFill>
-              </a:rPr>
-              <a:t>  Fraud Scoring       — ai_fraud_score column wired for Azure ML model inference</a:t>
-            </a:r>
-          </a:p>
-          <a:p>
-            <a:pPr lvl="1">
-              <a:spcAft>
-                <a:spcPts val="200"/>
-              </a:spcAft>
-            </a:pPr>
-            <a:r>
-              <a:rPr sz="1100">
-                <a:solidFill>
-                  <a:srgbClr val="000000"/>
-                </a:solidFill>
-              </a:rPr>
-              <a:t>  LLM Summarisation   — ai_root_cause_hint via Azure OpenAI GPT-4o (placeholder wired)</a:t>
-            </a:r>
-          </a:p>
-          <a:p>
-            <a:pPr lvl="1">
-              <a:spcAft>
-                <a:spcPts val="200"/>
-              </a:spcAft>
-            </a:pPr>
-            <a:r>
-              <a:rPr sz="1100">
-                <a:solidFill>
-                  <a:srgbClr val="000000"/>
-                </a:solidFill>
-              </a:rPr>
-              <a:t>  Embeddings          — gld_log_embeddings table: 1536-dim float array, topic cluster</a:t>
-            </a:r>
-          </a:p>
-          <a:p>
-            <a:pPr>
-              <a:spcAft>
-                <a:spcPts val="200"/>
-              </a:spcAft>
-            </a:pPr>
-            <a:r>
-              <a:rPr sz="1200">
-                <a:solidFill>
-                  <a:srgbClr val="000000"/>
-                </a:solidFill>
-              </a:rPr>
-              <a:t/>
+              <a:t>Z-Score Anomaly Scoring Logic (Explainable by Design)</a:t>
+            </a:r>
+          </a:p>
+          <a:p>
+            <a:pPr>
+              <a:spcAft>
+                <a:spcPts val="100"/>
+              </a:spcAft>
+            </a:pPr>
+            <a:r>
+              <a:rPr sz="1100">
+                <a:solidFill>
+                  <a:srgbClr val="000000"/>
+                </a:solidFill>
+              </a:rPr>
+              <a:t>  •  Compute global mean + stddev_pop per batch window on amount and response_time_ms</a:t>
+            </a:r>
+          </a:p>
+          <a:p>
+            <a:pPr>
+              <a:spcAft>
+                <a:spcPts val="100"/>
+              </a:spcAft>
+            </a:pPr>
+            <a:r>
+              <a:rPr sz="1100">
+                <a:solidFill>
+                  <a:srgbClr val="000000"/>
+                </a:solidFill>
+              </a:rPr>
+              <a:t>  •  Per-row: max_z = max(|Z_amount|, |Z_response_time|)</a:t>
+            </a:r>
+          </a:p>
+          <a:p>
+            <a:pPr>
+              <a:spcAft>
+                <a:spcPts val="100"/>
+              </a:spcAft>
+            </a:pPr>
+            <a:r>
+              <a:rPr sz="1100">
+                <a:solidFill>
+                  <a:srgbClr val="000000"/>
+                </a:solidFill>
+              </a:rPr>
+              <a:t>  •  Normalise: anomaly_score = min(max_z, 5) / 5  →  range [0.0, 1.0]</a:t>
+            </a:r>
+          </a:p>
+          <a:p>
+            <a:pPr>
+              <a:spcAft>
+                <a:spcPts val="100"/>
+              </a:spcAft>
+            </a:pPr>
+            <a:r>
+              <a:rPr sz="1100">
+                <a:solidFill>
+                  <a:srgbClr val="000000"/>
+                </a:solidFill>
+              </a:rPr>
+              <a:t>  •  Thresholds: SUSPICIOUS if |Z| ≥ 2.0   |   HIGH_RISK if |Z| ≥ 3.5</a:t>
+            </a:r>
+          </a:p>
+          <a:p>
+            <a:pPr>
+              <a:spcAft>
+                <a:spcPts val="100"/>
+              </a:spcAft>
+            </a:pPr>
+            <a:r>
+              <a:rPr sz="1100">
+                <a:solidFill>
+                  <a:srgbClr val="000000"/>
+                </a:solidFill>
+              </a:rPr>
+              <a:t>  •  Rationale: explainable to compliance officers without black-box model at MVP</a:t>
+            </a:r>
+          </a:p>
+          <a:p>
+            <a:pPr>
+              <a:spcAft>
+                <a:spcPts val="100"/>
+              </a:spcAft>
+            </a:pPr>
+            <a:r>
+              <a:rPr sz="600"/>
+              <a:t> </a:t>
             </a:r>
           </a:p>
           <a:p>
             <a:pPr>
               <a:spcBef>
-                <a:spcPts val="1000"/>
+                <a:spcPts val="800"/>
               </a:spcBef>
               <a:spcAft>
-                <a:spcPts val="200"/>
-              </a:spcAft>
-            </a:pPr>
-            <a:r>
-              <a:rPr sz="1500" b="1">
+                <a:spcPts val="100"/>
+              </a:spcAft>
+            </a:pPr>
+            <a:r>
+              <a:rPr sz="1400" b="1">
                 <a:solidFill>
                   <a:srgbClr val="006BFF"/>
                 </a:solidFill>
               </a:rPr>
-              <a:t>Anomaly Scoring Logic (Z-Score — Explainable by Design)</a:t>
-            </a:r>
-          </a:p>
-          <a:p>
-            <a:pPr lvl="1">
-              <a:spcAft>
-                <a:spcPts val="200"/>
-              </a:spcAft>
-            </a:pPr>
-            <a:r>
-              <a:rPr sz="1100">
-                <a:solidFill>
-                  <a:srgbClr val="000000"/>
-                </a:solidFill>
-              </a:rPr>
-              <a:t>  Compute global mean + stddev_pop per batch window on amount and response_time_ms</a:t>
-            </a:r>
-          </a:p>
-          <a:p>
-            <a:pPr lvl="1">
-              <a:spcAft>
-                <a:spcPts val="200"/>
-              </a:spcAft>
-            </a:pPr>
-            <a:r>
-              <a:rPr sz="1100">
-                <a:solidFill>
-                  <a:srgbClr val="000000"/>
-                </a:solidFill>
-              </a:rPr>
-              <a:t>  Per-row: max_z = max(|Z_amount|, |Z_response_time|)</a:t>
-            </a:r>
-          </a:p>
-          <a:p>
-            <a:pPr lvl="1">
-              <a:spcAft>
-                <a:spcPts val="200"/>
-              </a:spcAft>
-            </a:pPr>
-            <a:r>
-              <a:rPr sz="1100">
-                <a:solidFill>
-                  <a:srgbClr val="000000"/>
-                </a:solidFill>
-              </a:rPr>
-              <a:t>  Normalise: anomaly_score = min(max_z, 5) / 5  → range [0.0, 1.0]</a:t>
-            </a:r>
-          </a:p>
-          <a:p>
-            <a:pPr lvl="1">
-              <a:spcAft>
-                <a:spcPts val="200"/>
-              </a:spcAft>
-            </a:pPr>
-            <a:r>
-              <a:rPr sz="1100">
-                <a:solidFill>
-                  <a:srgbClr val="000000"/>
-                </a:solidFill>
-              </a:rPr>
-              <a:t>  Thresholds: SUSPICIOUS if |Z| ≥ 2.0,  HIGH_RISK if |Z| ≥ 3.5</a:t>
-            </a:r>
-          </a:p>
-          <a:p>
-            <a:pPr lvl="1">
-              <a:spcAft>
-                <a:spcPts val="200"/>
-              </a:spcAft>
-            </a:pPr>
-            <a:r>
-              <a:rPr sz="1100">
-                <a:solidFill>
-                  <a:srgbClr val="000000"/>
-                </a:solidFill>
-              </a:rPr>
-              <a:t>  Rationale: explainable to compliance officers — no black-box model needed at MVP</a:t>
-            </a:r>
-          </a:p>
-          <a:p>
-            <a:pPr>
-              <a:spcAft>
-                <a:spcPts val="200"/>
-              </a:spcAft>
-            </a:pPr>
-            <a:r>
-              <a:rPr sz="1200">
-                <a:solidFill>
-                  <a:srgbClr val="000000"/>
-                </a:solidFill>
-              </a:rPr>
-              <a:t/>
+              <a:t>Auth Velocity Detection (Account Takeover Signal)</a:t>
+            </a:r>
+          </a:p>
+          <a:p>
+            <a:pPr>
+              <a:spcAft>
+                <a:spcPts val="100"/>
+              </a:spcAft>
+            </a:pPr>
+            <a:r>
+              <a:rPr sz="1100">
+                <a:solidFill>
+                  <a:srgbClr val="000000"/>
+                </a:solidFill>
+              </a:rPr>
+              <a:t>  •  Rolling 1-hour window per user_id, count failed auth events (PySpark rangeBetween)</a:t>
+            </a:r>
+          </a:p>
+          <a:p>
+            <a:pPr>
+              <a:spcAft>
+                <a:spcPts val="100"/>
+              </a:spcAft>
+            </a:pPr>
+            <a:r>
+              <a:rPr sz="1100">
+                <a:solidFill>
+                  <a:srgbClr val="000000"/>
+                </a:solidFill>
+              </a:rPr>
+              <a:t>  •  Flag is_high_velocity = TRUE when failure count ≥ configurable threshold</a:t>
+            </a:r>
+          </a:p>
+          <a:p>
+            <a:pPr>
+              <a:spcAft>
+                <a:spcPts val="100"/>
+              </a:spcAft>
+            </a:pPr>
+            <a:r>
+              <a:rPr sz="1100">
+                <a:solidFill>
+                  <a:srgbClr val="000000"/>
+                </a:solidFill>
+              </a:rPr>
+              <a:t>  •  Feeds gld_fact_auth_events.ai_account_takeover_score column</a:t>
+            </a:r>
+          </a:p>
+          <a:p>
+            <a:pPr>
+              <a:spcAft>
+                <a:spcPts val="100"/>
+              </a:spcAft>
+            </a:pPr>
+            <a:r>
+              <a:rPr sz="600"/>
+              <a:t> </a:t>
             </a:r>
           </a:p>
           <a:p>
             <a:pPr>
               <a:spcBef>
-                <a:spcPts val="1000"/>
+                <a:spcPts val="800"/>
               </a:spcBef>
               <a:spcAft>
-                <a:spcPts val="200"/>
-              </a:spcAft>
-            </a:pPr>
-            <a:r>
-              <a:rPr sz="1500" b="1">
+                <a:spcPts val="100"/>
+              </a:spcAft>
+            </a:pPr>
+            <a:r>
+              <a:rPr sz="1400" b="1">
                 <a:solidFill>
                   <a:srgbClr val="006BFF"/>
                 </a:solidFill>
               </a:rPr>
-              <a:t>Auth Velocity Detection (Fraud Signal)</a:t>
-            </a:r>
-          </a:p>
-          <a:p>
-            <a:pPr lvl="1">
-              <a:spcAft>
-                <a:spcPts val="200"/>
-              </a:spcAft>
-            </a:pPr>
-            <a:r>
-              <a:rPr sz="1100">
-                <a:solidFill>
-                  <a:srgbClr val="000000"/>
-                </a:solidFill>
-              </a:rPr>
-              <a:t>  Window: per user_id, rolling 1-hour range, count failed auth events</a:t>
-            </a:r>
-          </a:p>
-          <a:p>
-            <a:pPr lvl="1">
-              <a:spcAft>
-                <a:spcPts val="200"/>
-              </a:spcAft>
-            </a:pPr>
-            <a:r>
-              <a:rPr sz="1100">
-                <a:solidFill>
-                  <a:srgbClr val="000000"/>
-                </a:solidFill>
-              </a:rPr>
-              <a:t>  Flag is_high_velocity = TRUE when failure count ≥ configurable threshold</a:t>
-            </a:r>
-          </a:p>
-          <a:p>
-            <a:pPr lvl="1">
-              <a:spcAft>
-                <a:spcPts val="200"/>
-              </a:spcAft>
-            </a:pPr>
-            <a:r>
-              <a:rPr sz="1100">
-                <a:solidFill>
-                  <a:srgbClr val="000000"/>
-                </a:solidFill>
-              </a:rPr>
-              <a:t>  Feeds gld_fact_auth_events.ai_account_takeover_score</a:t>
-            </a:r>
-          </a:p>
-          <a:p>
-            <a:pPr>
-              <a:spcAft>
-                <a:spcPts val="200"/>
-              </a:spcAft>
-            </a:pPr>
-            <a:r>
-              <a:rPr sz="1200">
-                <a:solidFill>
-                  <a:srgbClr val="000000"/>
-                </a:solidFill>
-              </a:rPr>
-              <a:t/>
-            </a:r>
-          </a:p>
-          <a:p>
-            <a:pPr>
-              <a:spcBef>
-                <a:spcPts val="1000"/>
-              </a:spcBef>
-              <a:spcAft>
-                <a:spcPts val="200"/>
-              </a:spcAft>
-            </a:pPr>
-            <a:r>
-              <a:rPr sz="1500" b="1">
-                <a:solidFill>
-                  <a:srgbClr val="006BFF"/>
-                </a:solidFill>
-              </a:rPr>
               <a:t>AI Roadmap</a:t>
             </a:r>
           </a:p>
           <a:p>
-            <a:pPr lvl="1">
-              <a:spcAft>
-                <a:spcPts val="200"/>
-              </a:spcAft>
-            </a:pPr>
-            <a:r>
-              <a:rPr sz="1100">
-                <a:solidFill>
-                  <a:srgbClr val="000000"/>
-                </a:solidFill>
-              </a:rPr>
-              <a:t>  Phase 2: Replace Z-score with trained Isolation Forest (Azure ML)</a:t>
-            </a:r>
-          </a:p>
-          <a:p>
-            <a:pPr lvl="1">
-              <a:spcAft>
-                <a:spcPts val="200"/>
-              </a:spcAft>
-            </a:pPr>
-            <a:r>
-              <a:rPr sz="1100">
-                <a:solidFill>
-                  <a:srgbClr val="000000"/>
-                </a:solidFill>
-              </a:rPr>
-              <a:t>  Phase 3: Azure OpenAI semantic search on gld_log_embeddings via Azure AI Search</a:t>
-            </a:r>
-          </a:p>
-          <a:p>
-            <a:pPr lvl="1">
-              <a:spcAft>
-                <a:spcPts val="200"/>
-              </a:spcAft>
-            </a:pPr>
-            <a:r>
-              <a:rPr sz="1100">
-                <a:solidFill>
-                  <a:srgbClr val="000000"/>
-                </a:solidFill>
-              </a:rPr>
-              <a:t>  Phase 4: LLM-generated incident summaries auto-posted to Teams/ServiceNow</a:t>
+            <a:pPr>
+              <a:spcAft>
+                <a:spcPts val="100"/>
+              </a:spcAft>
+            </a:pPr>
+            <a:r>
+              <a:rPr sz="1100">
+                <a:solidFill>
+                  <a:srgbClr val="000000"/>
+                </a:solidFill>
+              </a:rPr>
+              <a:t>  •  Phase 2: Replace Z-score with trained Isolation Forest via Azure ML managed endpoints</a:t>
+            </a:r>
+          </a:p>
+          <a:p>
+            <a:pPr>
+              <a:spcAft>
+                <a:spcPts val="100"/>
+              </a:spcAft>
+            </a:pPr>
+            <a:r>
+              <a:rPr sz="1100">
+                <a:solidFill>
+                  <a:srgbClr val="000000"/>
+                </a:solidFill>
+              </a:rPr>
+              <a:t>  •  Phase 3: Azure AI Search on gld_log_embeddings — semantic similarity queries on logs</a:t>
+            </a:r>
+          </a:p>
+          <a:p>
+            <a:pPr>
+              <a:spcAft>
+                <a:spcPts val="100"/>
+              </a:spcAft>
+            </a:pPr>
+            <a:r>
+              <a:rPr sz="1100">
+                <a:solidFill>
+                  <a:srgbClr val="000000"/>
+                </a:solidFill>
+              </a:rPr>
+              <a:t>  •  Phase 4: Auto-generated incident summaries posted to Teams / ServiceNow via Logic Apps</a:t>
             </a:r>
           </a:p>
         </p:txBody>
@@ -6773,16 +5571,40 @@
         <p:nvPr/>
       </p:nvGrpSpPr>
       <p:grpSpPr/>
-      <p:sp>
-        <p:nvSpPr>
-          <p:cNvPr id="2" name="TextBox 1"/>
+      <p:pic>
+        <p:nvPicPr>
+          <p:cNvPr id="2" name="Picture 1" descr="image3.png"/>
+          <p:cNvPicPr>
+            <a:picLocks noChangeAspect="1"/>
+          </p:cNvPicPr>
+          <p:nvPr/>
+        </p:nvPicPr>
+        <p:blipFill>
+          <a:blip r:embed="rId2"/>
+          <a:stretch>
+            <a:fillRect/>
+          </a:stretch>
+        </p:blipFill>
+        <p:spPr>
+          <a:xfrm>
+            <a:off x="0" y="0"/>
+            <a:ext cx="12188952" cy="6858000"/>
+          </a:xfrm>
+          <a:prstGeom prst="rect">
+            <a:avLst/>
+          </a:prstGeom>
+        </p:spPr>
+      </p:pic>
+      <p:sp>
+        <p:nvSpPr>
+          <p:cNvPr id="3" name="TextBox 2"/>
           <p:cNvSpPr txBox="1"/>
           <p:nvPr/>
         </p:nvSpPr>
         <p:spPr>
           <a:xfrm>
-            <a:off x="228600" y="91440"/>
-            <a:ext cx="3657600" cy="274320"/>
+            <a:off x="457200" y="201168"/>
+            <a:ext cx="11247120" cy="777240"/>
           </a:xfrm>
           <a:prstGeom prst="rect">
             <a:avLst/>
@@ -6797,26 +5619,26 @@
           <a:p>
             <a:pPr algn="l"/>
             <a:r>
-              <a:rPr sz="900" b="0" i="0">
-                <a:solidFill>
-                  <a:srgbClr val="00B050"/>
-                </a:solidFill>
-              </a:rPr>
-              <a:t>Classification: Internal</a:t>
-            </a:r>
-          </a:p>
-        </p:txBody>
-      </p:sp>
-      <p:sp>
-        <p:nvSpPr>
-          <p:cNvPr id="3" name="TextBox 2"/>
+              <a:rPr sz="3000" b="1" i="0">
+                <a:solidFill>
+                  <a:srgbClr val="000000"/>
+                </a:solidFill>
+              </a:rPr>
+              <a:t>Testing Strategy</a:t>
+            </a:r>
+          </a:p>
+        </p:txBody>
+      </p:sp>
+      <p:sp>
+        <p:nvSpPr>
+          <p:cNvPr id="4" name="TextBox 3"/>
           <p:cNvSpPr txBox="1"/>
           <p:nvPr/>
         </p:nvSpPr>
         <p:spPr>
           <a:xfrm>
-            <a:off x="228600" y="6492240"/>
-            <a:ext cx="4572000" cy="274320"/>
+            <a:off x="502920" y="1325880"/>
+            <a:ext cx="11155680" cy="5212080"/>
           </a:xfrm>
           <a:prstGeom prst="rect">
             <a:avLst/>
@@ -6829,568 +5651,392 @@
           </a:bodyPr>
           <a:lstStyle/>
           <a:p>
-            <a:pPr algn="l"/>
-            <a:r>
-              <a:rPr sz="800" b="0" i="0">
-                <a:solidFill>
-                  <a:srgbClr val="666666"/>
-                </a:solidFill>
-              </a:rPr>
-              <a:t>Copyright © 2025 HCLTech | Confidential</a:t>
-            </a:r>
-          </a:p>
-        </p:txBody>
-      </p:sp>
-      <p:sp>
-        <p:nvSpPr>
-          <p:cNvPr id="4" name="TextBox 3"/>
-          <p:cNvSpPr txBox="1"/>
-          <p:nvPr/>
-        </p:nvSpPr>
-        <p:spPr>
-          <a:xfrm>
-            <a:off x="10543032" y="6446520"/>
-            <a:ext cx="1463040" cy="320040"/>
-          </a:xfrm>
-          <a:prstGeom prst="rect">
-            <a:avLst/>
-          </a:prstGeom>
-          <a:noFill/>
-        </p:spPr>
-        <p:txBody>
-          <a:bodyPr wrap="square">
-            <a:spAutoFit/>
-          </a:bodyPr>
-          <a:lstStyle/>
-          <a:p>
-            <a:pPr algn="r"/>
-            <a:r>
-              <a:rPr sz="1400" b="1" i="0">
+            <a:pPr>
+              <a:spcBef>
+                <a:spcPts val="800"/>
+              </a:spcBef>
+              <a:spcAft>
+                <a:spcPts val="100"/>
+              </a:spcAft>
+            </a:pPr>
+            <a:r>
+              <a:rPr sz="1400" b="1">
                 <a:solidFill>
                   <a:srgbClr val="006BFF"/>
                 </a:solidFill>
               </a:rPr>
-              <a:t>HCLTech</a:t>
-            </a:r>
-          </a:p>
-        </p:txBody>
-      </p:sp>
-      <p:sp>
-        <p:nvSpPr>
-          <p:cNvPr id="5" name="TextBox 4"/>
-          <p:cNvSpPr txBox="1"/>
-          <p:nvPr/>
-        </p:nvSpPr>
-        <p:spPr>
-          <a:xfrm>
-            <a:off x="457200" y="228600"/>
-            <a:ext cx="10972800" cy="777240"/>
-          </a:xfrm>
-          <a:prstGeom prst="rect">
-            <a:avLst/>
-          </a:prstGeom>
-          <a:noFill/>
-        </p:spPr>
-        <p:txBody>
-          <a:bodyPr wrap="square">
-            <a:spAutoFit/>
-          </a:bodyPr>
-          <a:lstStyle/>
-          <a:p>
-            <a:pPr algn="l"/>
-            <a:r>
-              <a:rPr sz="3200" b="1" i="0">
-                <a:solidFill>
-                  <a:srgbClr val="000000"/>
-                </a:solidFill>
-              </a:rPr>
-              <a:t>Testing Strategy</a:t>
-            </a:r>
-          </a:p>
-        </p:txBody>
-      </p:sp>
-      <p:sp>
-        <p:nvSpPr>
-          <p:cNvPr id="6" name="Rectangle 5"/>
-          <p:cNvSpPr/>
-          <p:nvPr/>
-        </p:nvSpPr>
-        <p:spPr>
-          <a:xfrm>
-            <a:off x="457200" y="1097280"/>
-            <a:ext cx="11247120" cy="27432"/>
-          </a:xfrm>
-          <a:prstGeom prst="rect">
-            <a:avLst/>
-          </a:prstGeom>
-          <a:solidFill>
-            <a:srgbClr val="006BFF"/>
-          </a:solidFill>
-          <a:ln>
-            <a:noFill/>
-          </a:ln>
-        </p:spPr>
-        <p:style>
-          <a:lnRef idx="1">
-            <a:schemeClr val="accent1"/>
-          </a:lnRef>
-          <a:fillRef idx="3">
-            <a:schemeClr val="accent1"/>
-          </a:fillRef>
-          <a:effectRef idx="2">
-            <a:schemeClr val="accent1"/>
-          </a:effectRef>
-          <a:fontRef idx="minor">
-            <a:schemeClr val="lt1"/>
-          </a:fontRef>
-        </p:style>
-        <p:txBody>
-          <a:bodyPr rtlCol="0" anchor="ctr"/>
-          <a:lstStyle/>
-          <a:p>
-            <a:pPr algn="ctr"/>
-          </a:p>
-        </p:txBody>
-      </p:sp>
-      <p:sp>
-        <p:nvSpPr>
-          <p:cNvPr id="7" name="TextBox 6"/>
-          <p:cNvSpPr txBox="1"/>
-          <p:nvPr/>
-        </p:nvSpPr>
-        <p:spPr>
-          <a:xfrm>
-            <a:off x="457200" y="1234440"/>
-            <a:ext cx="11247120" cy="5212080"/>
-          </a:xfrm>
-          <a:prstGeom prst="rect">
-            <a:avLst/>
-          </a:prstGeom>
-          <a:noFill/>
-        </p:spPr>
-        <p:txBody>
-          <a:bodyPr wrap="square">
-            <a:spAutoFit/>
-          </a:bodyPr>
-          <a:lstStyle/>
+              <a:t>Data Quality Gates (Built into Silver Pipelines)</a:t>
+            </a:r>
+          </a:p>
+          <a:p>
+            <a:pPr>
+              <a:spcAft>
+                <a:spcPts val="100"/>
+              </a:spcAft>
+            </a:pPr>
+            <a:r>
+              <a:rPr sz="1100">
+                <a:solidFill>
+                  <a:srgbClr val="000000"/>
+                </a:solidFill>
+              </a:rPr>
+              <a:t>  •  Null check:       Mandatory fields — transaction_ref, account_sk, event_timestamp</a:t>
+            </a:r>
+          </a:p>
+          <a:p>
+            <a:pPr>
+              <a:spcAft>
+                <a:spcPts val="100"/>
+              </a:spcAft>
+            </a:pPr>
+            <a:r>
+              <a:rPr sz="1100">
+                <a:solidFill>
+                  <a:srgbClr val="000000"/>
+                </a:solidFill>
+              </a:rPr>
+              <a:t>  •  Deduplication:    row_number() on raw_log_id — first occurrence wins, rest rejected</a:t>
+            </a:r>
+          </a:p>
+          <a:p>
+            <a:pPr>
+              <a:spcAft>
+                <a:spcPts val="100"/>
+              </a:spcAft>
+            </a:pPr>
+            <a:r>
+              <a:rPr sz="1100">
+                <a:solidFill>
+                  <a:srgbClr val="000000"/>
+                </a:solidFill>
+              </a:rPr>
+              <a:t>  •  Range validation: amount &gt; 0 ;  response_time_ms between 0 and 300,000</a:t>
+            </a:r>
+          </a:p>
+          <a:p>
+            <a:pPr>
+              <a:spcAft>
+                <a:spcPts val="100"/>
+              </a:spcAft>
+            </a:pPr>
+            <a:r>
+              <a:rPr sz="1100">
+                <a:solidFill>
+                  <a:srgbClr val="000000"/>
+                </a:solidFill>
+              </a:rPr>
+              <a:t>  •  Batch abort:      Pipeline hard-fails if reject fraction exceeds configurable threshold</a:t>
+            </a:r>
+          </a:p>
+          <a:p>
+            <a:pPr>
+              <a:spcAft>
+                <a:spcPts val="100"/>
+              </a:spcAft>
+            </a:pPr>
+            <a:r>
+              <a:rPr sz="1100">
+                <a:solidFill>
+                  <a:srgbClr val="000000"/>
+                </a:solidFill>
+              </a:rPr>
+              <a:t>  •  DQ metrics:       null_count, duplicate_count, rejected_count → slv_ctrl_dq_metrics Delta table</a:t>
+            </a:r>
+          </a:p>
+          <a:p>
+            <a:pPr>
+              <a:spcAft>
+                <a:spcPts val="100"/>
+              </a:spcAft>
+            </a:pPr>
+            <a:r>
+              <a:rPr sz="600"/>
+              <a:t> </a:t>
+            </a:r>
+          </a:p>
           <a:p>
             <a:pPr>
               <a:spcBef>
-                <a:spcPts val="1000"/>
+                <a:spcPts val="800"/>
               </a:spcBef>
               <a:spcAft>
-                <a:spcPts val="200"/>
-              </a:spcAft>
-            </a:pPr>
-            <a:r>
-              <a:rPr sz="1500" b="1">
+                <a:spcPts val="100"/>
+              </a:spcAft>
+            </a:pPr>
+            <a:r>
+              <a:rPr sz="1400" b="1">
                 <a:solidFill>
                   <a:srgbClr val="006BFF"/>
                 </a:solidFill>
               </a:rPr>
-              <a:t>Data Quality Gates (Built into Silver Pipelines)</a:t>
-            </a:r>
-          </a:p>
-          <a:p>
-            <a:pPr lvl="1">
-              <a:spcAft>
-                <a:spcPts val="200"/>
-              </a:spcAft>
-            </a:pPr>
-            <a:r>
-              <a:rPr sz="1100">
-                <a:solidFill>
-                  <a:srgbClr val="000000"/>
-                </a:solidFill>
-              </a:rPr>
-              <a:t>  Null check:      Mandatory fields (transaction_ref, account_sk, event_timestamp)</a:t>
-            </a:r>
-          </a:p>
-          <a:p>
-            <a:pPr lvl="1">
-              <a:spcAft>
-                <a:spcPts val="200"/>
-              </a:spcAft>
-            </a:pPr>
-            <a:r>
-              <a:rPr sz="1100">
-                <a:solidFill>
-                  <a:srgbClr val="000000"/>
-                </a:solidFill>
-              </a:rPr>
-              <a:t>  Deduplication:   row_number() on raw_log_id — first occurrence wins</a:t>
-            </a:r>
-          </a:p>
-          <a:p>
-            <a:pPr lvl="1">
-              <a:spcAft>
-                <a:spcPts val="200"/>
-              </a:spcAft>
-            </a:pPr>
-            <a:r>
-              <a:rPr sz="1100">
-                <a:solidFill>
-                  <a:srgbClr val="000000"/>
-                </a:solidFill>
-              </a:rPr>
-              <a:t>  Range validation: amount &gt; 0; response_time_ms between 0 and 300,000</a:t>
-            </a:r>
-          </a:p>
-          <a:p>
-            <a:pPr lvl="1">
-              <a:spcAft>
-                <a:spcPts val="200"/>
-              </a:spcAft>
-            </a:pPr>
-            <a:r>
-              <a:rPr sz="1100">
-                <a:solidFill>
-                  <a:srgbClr val="000000"/>
-                </a:solidFill>
-              </a:rPr>
-              <a:t>  Batch abort:     Pipeline hard-fails if reject fraction &gt; configurable threshold</a:t>
-            </a:r>
-          </a:p>
-          <a:p>
-            <a:pPr lvl="1">
-              <a:spcAft>
-                <a:spcPts val="200"/>
-              </a:spcAft>
-            </a:pPr>
-            <a:r>
-              <a:rPr sz="1100">
-                <a:solidFill>
-                  <a:srgbClr val="000000"/>
-                </a:solidFill>
-              </a:rPr>
-              <a:t>  DQ metrics:      null_count, duplicate_count, rejected_count logged to slv_ctrl_dq_metrics</a:t>
-            </a:r>
-          </a:p>
-          <a:p>
-            <a:pPr>
-              <a:spcAft>
-                <a:spcPts val="200"/>
-              </a:spcAft>
-            </a:pPr>
-            <a:r>
-              <a:rPr sz="1200">
-                <a:solidFill>
-                  <a:srgbClr val="000000"/>
-                </a:solidFill>
-              </a:rPr>
-              <a:t/>
+              <a:t>Pipeline Validation</a:t>
+            </a:r>
+          </a:p>
+          <a:p>
+            <a:pPr>
+              <a:spcAft>
+                <a:spcPts val="100"/>
+              </a:spcAft>
+            </a:pPr>
+            <a:r>
+              <a:rPr sz="1100">
+                <a:solidFill>
+                  <a:srgbClr val="000000"/>
+                </a:solidFill>
+              </a:rPr>
+              <a:t>  •  Zero-row check:   scr_validate_silver — RAISERROR if Silver count = 0 for the batch</a:t>
+            </a:r>
+          </a:p>
+          <a:p>
+            <a:pPr>
+              <a:spcAft>
+                <a:spcPts val="100"/>
+              </a:spcAft>
+            </a:pPr>
+            <a:r>
+              <a:rPr sz="1100">
+                <a:solidFill>
+                  <a:srgbClr val="000000"/>
+                </a:solidFill>
+              </a:rPr>
+              <a:t>  •  Watermark check:  lkp_get_watermark prevents double-processing on Bronze pipeline re-run</a:t>
+            </a:r>
+          </a:p>
+          <a:p>
+            <a:pPr>
+              <a:spcAft>
+                <a:spcPts val="100"/>
+              </a:spcAft>
+            </a:pPr>
+            <a:r>
+              <a:rPr sz="1100">
+                <a:solidFill>
+                  <a:srgbClr val="000000"/>
+                </a:solidFill>
+              </a:rPr>
+              <a:t>  •  Idempotency:      Delta MERGE (upsert on surrogate key) — safe to re-run any notebook</a:t>
+            </a:r>
+          </a:p>
+          <a:p>
+            <a:pPr>
+              <a:spcAft>
+                <a:spcPts val="100"/>
+              </a:spcAft>
+            </a:pPr>
+            <a:r>
+              <a:rPr sz="1100">
+                <a:solidFill>
+                  <a:srgbClr val="000000"/>
+                </a:solidFill>
+              </a:rPr>
+              <a:t>  •  Partition safety: Dynamic partition overwrite on aggregates — reruns replace, not append</a:t>
+            </a:r>
+          </a:p>
+          <a:p>
+            <a:pPr>
+              <a:spcAft>
+                <a:spcPts val="100"/>
+              </a:spcAft>
+            </a:pPr>
+            <a:r>
+              <a:rPr sz="600"/>
+              <a:t> </a:t>
             </a:r>
           </a:p>
           <a:p>
             <a:pPr>
               <a:spcBef>
-                <a:spcPts val="1000"/>
+                <a:spcPts val="800"/>
               </a:spcBef>
               <a:spcAft>
-                <a:spcPts val="200"/>
-              </a:spcAft>
-            </a:pPr>
-            <a:r>
-              <a:rPr sz="1500" b="1">
+                <a:spcPts val="100"/>
+              </a:spcAft>
+            </a:pPr>
+            <a:r>
+              <a:rPr sz="1400" b="1">
                 <a:solidFill>
                   <a:srgbClr val="006BFF"/>
                 </a:solidFill>
               </a:rPr>
-              <a:t>Pipeline Validation (Gold)</a:t>
-            </a:r>
-          </a:p>
-          <a:p>
-            <a:pPr lvl="1">
-              <a:spcAft>
-                <a:spcPts val="200"/>
-              </a:spcAft>
-            </a:pPr>
-            <a:r>
-              <a:rPr sz="1100">
-                <a:solidFill>
-                  <a:srgbClr val="000000"/>
-                </a:solidFill>
-              </a:rPr>
-              <a:t>  Zero-row check:  scr_validate_silver activity — RAISERROR if Silver count = 0 for batch</a:t>
-            </a:r>
-          </a:p>
-          <a:p>
-            <a:pPr lvl="1">
-              <a:spcAft>
-                <a:spcPts val="200"/>
-              </a:spcAft>
-            </a:pPr>
-            <a:r>
-              <a:rPr sz="1100">
-                <a:solidFill>
-                  <a:srgbClr val="000000"/>
-                </a:solidFill>
-              </a:rPr>
-              <a:t>  Watermark check: lkp_get_watermark prevents double-processing on Bronze re-run</a:t>
-            </a:r>
-          </a:p>
-          <a:p>
-            <a:pPr lvl="1">
-              <a:spcAft>
-                <a:spcPts val="200"/>
-              </a:spcAft>
-            </a:pPr>
-            <a:r>
-              <a:rPr sz="1100">
-                <a:solidFill>
-                  <a:srgbClr val="000000"/>
-                </a:solidFill>
-              </a:rPr>
-              <a:t>  Idempotency:     Delta MERGE (upsert on surrogate key) — safe to re-run any notebook</a:t>
-            </a:r>
-          </a:p>
-          <a:p>
-            <a:pPr lvl="1">
-              <a:spcAft>
-                <a:spcPts val="200"/>
-              </a:spcAft>
-            </a:pPr>
-            <a:r>
-              <a:rPr sz="1100">
-                <a:solidFill>
-                  <a:srgbClr val="000000"/>
-                </a:solidFill>
-              </a:rPr>
-              <a:t>  Partition overwrite: dynamic partition mode on aggregates — reruns replace, not append</a:t>
-            </a:r>
-          </a:p>
-          <a:p>
-            <a:pPr>
-              <a:spcAft>
-                <a:spcPts val="200"/>
-              </a:spcAft>
-            </a:pPr>
-            <a:r>
-              <a:rPr sz="1200">
-                <a:solidFill>
-                  <a:srgbClr val="000000"/>
-                </a:solidFill>
-              </a:rPr>
-              <a:t/>
+              <a:t>Unit Testing Plan (Phase 2)</a:t>
+            </a:r>
+          </a:p>
+          <a:p>
+            <a:pPr>
+              <a:spcAft>
+                <a:spcPts val="100"/>
+              </a:spcAft>
+            </a:pPr>
+            <a:r>
+              <a:rPr sz="1100">
+                <a:solidFill>
+                  <a:srgbClr val="000000"/>
+                </a:solidFill>
+              </a:rPr>
+              <a:t>  •  PySpark transform logic: pytest + chispa DataFrame equality assertions</a:t>
+            </a:r>
+          </a:p>
+          <a:p>
+            <a:pPr>
+              <a:spcAft>
+                <a:spcPts val="100"/>
+              </a:spcAft>
+            </a:pPr>
+            <a:r>
+              <a:rPr sz="1100">
+                <a:solidFill>
+                  <a:srgbClr val="000000"/>
+                </a:solidFill>
+              </a:rPr>
+              <a:t>  •  DDL correctness: sqlfluff linting integrated into CI/CD pipeline</a:t>
+            </a:r>
+          </a:p>
+          <a:p>
+            <a:pPr>
+              <a:spcAft>
+                <a:spcPts val="100"/>
+              </a:spcAft>
+            </a:pPr>
+            <a:r>
+              <a:rPr sz="1100">
+                <a:solidFill>
+                  <a:srgbClr val="000000"/>
+                </a:solidFill>
+              </a:rPr>
+              <a:t>  •  Schema contracts: Great Expectations profiling on Silver output datasets</a:t>
+            </a:r>
+          </a:p>
+          <a:p>
+            <a:pPr>
+              <a:spcAft>
+                <a:spcPts val="100"/>
+              </a:spcAft>
+            </a:pPr>
+            <a:r>
+              <a:rPr sz="600"/>
+              <a:t> </a:t>
             </a:r>
           </a:p>
           <a:p>
             <a:pPr>
               <a:spcBef>
-                <a:spcPts val="1000"/>
+                <a:spcPts val="800"/>
               </a:spcBef>
               <a:spcAft>
-                <a:spcPts val="200"/>
-              </a:spcAft>
-            </a:pPr>
-            <a:r>
-              <a:rPr sz="1500" b="1">
+                <a:spcPts val="100"/>
+              </a:spcAft>
+            </a:pPr>
+            <a:r>
+              <a:rPr sz="1400" b="1">
                 <a:solidFill>
                   <a:srgbClr val="006BFF"/>
                 </a:solidFill>
               </a:rPr>
-              <a:t>Unit Testing Plan (Phase 2)</a:t>
-            </a:r>
-          </a:p>
-          <a:p>
-            <a:pPr lvl="1">
-              <a:spcAft>
-                <a:spcPts val="200"/>
-              </a:spcAft>
-            </a:pPr>
-            <a:r>
-              <a:rPr sz="1100">
-                <a:solidFill>
-                  <a:srgbClr val="000000"/>
-                </a:solidFill>
-              </a:rPr>
-              <a:t>  PySpark transform logic: pytest + chispa (DataFrame equality assertions)</a:t>
-            </a:r>
-          </a:p>
-          <a:p>
-            <a:pPr lvl="1">
-              <a:spcAft>
-                <a:spcPts val="200"/>
-              </a:spcAft>
-            </a:pPr>
-            <a:r>
-              <a:rPr sz="1100">
-                <a:solidFill>
-                  <a:srgbClr val="000000"/>
-                </a:solidFill>
-              </a:rPr>
-              <a:t>  DDL correctness: sqlfluff linting in CI pipeline</a:t>
-            </a:r>
-          </a:p>
-          <a:p>
-            <a:pPr lvl="1">
-              <a:spcAft>
-                <a:spcPts val="200"/>
-              </a:spcAft>
-            </a:pPr>
-            <a:r>
-              <a:rPr sz="1100">
-                <a:solidFill>
-                  <a:srgbClr val="000000"/>
-                </a:solidFill>
-              </a:rPr>
-              <a:t>  Schema contract: Great Expectations profiling on Silver output</a:t>
-            </a:r>
-          </a:p>
-          <a:p>
-            <a:pPr>
-              <a:spcAft>
-                <a:spcPts val="200"/>
-              </a:spcAft>
-            </a:pPr>
-            <a:r>
-              <a:rPr sz="1200">
-                <a:solidFill>
-                  <a:srgbClr val="000000"/>
-                </a:solidFill>
-              </a:rPr>
-              <a:t/>
+              <a:t>Integration &amp; E2E</a:t>
+            </a:r>
+          </a:p>
+          <a:p>
+            <a:pPr>
+              <a:spcAft>
+                <a:spcPts val="100"/>
+              </a:spcAft>
+            </a:pPr>
+            <a:r>
+              <a:rPr sz="1100">
+                <a:solidFill>
+                  <a:srgbClr val="000000"/>
+                </a:solidFill>
+              </a:rPr>
+              <a:t>  •  Inject synthetic banking events → assert Gold fact row exists with correct anomaly_score</a:t>
+            </a:r>
+          </a:p>
+          <a:p>
+            <a:pPr>
+              <a:spcAft>
+                <a:spcPts val="100"/>
+              </a:spcAft>
+            </a:pPr>
+            <a:r>
+              <a:rPr sz="1100">
+                <a:solidFill>
+                  <a:srgbClr val="000000"/>
+                </a:solidFill>
+              </a:rPr>
+              <a:t>  •  Regression: replay last 7 days Bronze on any schema migration to verify parity</a:t>
+            </a:r>
+          </a:p>
+          <a:p>
+            <a:pPr>
+              <a:spcAft>
+                <a:spcPts val="100"/>
+              </a:spcAft>
+            </a:pPr>
+            <a:r>
+              <a:rPr sz="1100">
+                <a:solidFill>
+                  <a:srgbClr val="000000"/>
+                </a:solidFill>
+              </a:rPr>
+              <a:t>  •  Performance SLA: gld_agg_txn_hourly query must complete &lt; 5 sec on DW100c</a:t>
+            </a:r>
+          </a:p>
+          <a:p>
+            <a:pPr>
+              <a:spcAft>
+                <a:spcPts val="100"/>
+              </a:spcAft>
+            </a:pPr>
+            <a:r>
+              <a:rPr sz="600"/>
+              <a:t> </a:t>
             </a:r>
           </a:p>
           <a:p>
             <a:pPr>
               <a:spcBef>
-                <a:spcPts val="1000"/>
+                <a:spcPts val="800"/>
               </a:spcBef>
               <a:spcAft>
-                <a:spcPts val="200"/>
-              </a:spcAft>
-            </a:pPr>
-            <a:r>
-              <a:rPr sz="1500" b="1">
+                <a:spcPts val="100"/>
+              </a:spcAft>
+            </a:pPr>
+            <a:r>
+              <a:rPr sz="1400" b="1">
                 <a:solidFill>
                   <a:srgbClr val="006BFF"/>
                 </a:solidFill>
               </a:rPr>
-              <a:t>Integration &amp; E2E Testing</a:t>
-            </a:r>
-          </a:p>
-          <a:p>
-            <a:pPr lvl="1">
-              <a:spcAft>
-                <a:spcPts val="200"/>
-              </a:spcAft>
-            </a:pPr>
-            <a:r>
-              <a:rPr sz="1100">
-                <a:solidFill>
-                  <a:srgbClr val="000000"/>
-                </a:solidFill>
-              </a:rPr>
-              <a:t>  End-to-end: inject synthetic banking log events → assert Gold fact row exists with correct anomaly_score</a:t>
-            </a:r>
-          </a:p>
-          <a:p>
-            <a:pPr lvl="1">
-              <a:spcAft>
-                <a:spcPts val="200"/>
-              </a:spcAft>
-            </a:pPr>
-            <a:r>
-              <a:rPr sz="1100">
-                <a:solidFill>
-                  <a:srgbClr val="000000"/>
-                </a:solidFill>
-              </a:rPr>
-              <a:t>  Regression: run on last 7 days of Bronze data after any schema migration</a:t>
-            </a:r>
-          </a:p>
-          <a:p>
-            <a:pPr lvl="1">
-              <a:spcAft>
-                <a:spcPts val="200"/>
-              </a:spcAft>
-            </a:pPr>
-            <a:r>
-              <a:rPr sz="1100">
-                <a:solidFill>
-                  <a:srgbClr val="000000"/>
-                </a:solidFill>
-              </a:rPr>
-              <a:t>  Performance: assert gld_agg_txn_hourly query completes &lt; 5 sec on DW100c</a:t>
-            </a:r>
-          </a:p>
-          <a:p>
-            <a:pPr>
-              <a:spcAft>
-                <a:spcPts val="200"/>
-              </a:spcAft>
-            </a:pPr>
-            <a:r>
-              <a:rPr sz="1200">
-                <a:solidFill>
-                  <a:srgbClr val="000000"/>
-                </a:solidFill>
-              </a:rPr>
-              <a:t/>
-            </a:r>
-          </a:p>
-          <a:p>
-            <a:pPr>
-              <a:spcBef>
-                <a:spcPts val="1000"/>
-              </a:spcBef>
-              <a:spcAft>
-                <a:spcPts val="200"/>
-              </a:spcAft>
-            </a:pPr>
-            <a:r>
-              <a:rPr sz="1500" b="1">
-                <a:solidFill>
-                  <a:srgbClr val="006BFF"/>
-                </a:solidFill>
-              </a:rPr>
               <a:t>Observability</a:t>
             </a:r>
           </a:p>
           <a:p>
-            <a:pPr lvl="1">
-              <a:spcAft>
-                <a:spcPts val="200"/>
-              </a:spcAft>
-            </a:pPr>
-            <a:r>
-              <a:rPr sz="1100">
-                <a:solidFill>
-                  <a:srgbClr val="000000"/>
-                </a:solidFill>
-              </a:rPr>
-              <a:t>  Azure Monitor: alert if Bronze pipeline fails 2 consecutive runs</a:t>
-            </a:r>
-          </a:p>
-          <a:p>
-            <a:pPr lvl="1">
-              <a:spcAft>
-                <a:spcPts val="200"/>
-              </a:spcAft>
-            </a:pPr>
-            <a:r>
-              <a:rPr sz="1100">
-                <a:solidFill>
-                  <a:srgbClr val="000000"/>
-                </a:solidFill>
-              </a:rPr>
-              <a:t>  Logic App webhook: POST to Teams channel on any pipeline FAILED status</a:t>
-            </a:r>
-          </a:p>
-          <a:p>
-            <a:pPr lvl="1">
-              <a:spcAft>
-                <a:spcPts val="200"/>
-              </a:spcAft>
-            </a:pPr>
-            <a:r>
-              <a:rPr sz="1100">
-                <a:solidFill>
-                  <a:srgbClr val="000000"/>
-                </a:solidFill>
-              </a:rPr>
-              <a:t>  gld_anomaly_events.is_acknowledged feedback loop for ops validation</a:t>
+            <a:pPr>
+              <a:spcAft>
+                <a:spcPts val="100"/>
+              </a:spcAft>
+            </a:pPr>
+            <a:r>
+              <a:rPr sz="1100">
+                <a:solidFill>
+                  <a:srgbClr val="000000"/>
+                </a:solidFill>
+              </a:rPr>
+              <a:t>  •  Azure Monitor: alert if Bronze pipeline fails 2 consecutive 15-min runs</a:t>
+            </a:r>
+          </a:p>
+          <a:p>
+            <a:pPr>
+              <a:spcAft>
+                <a:spcPts val="100"/>
+              </a:spcAft>
+            </a:pPr>
+            <a:r>
+              <a:rPr sz="1100">
+                <a:solidFill>
+                  <a:srgbClr val="000000"/>
+                </a:solidFill>
+              </a:rPr>
+              <a:t>  •  Logic App webhook: POST to Teams on any pipeline FAILED status with batch_id + error</a:t>
             </a:r>
           </a:p>
         </p:txBody>
@@ -7413,12 +6059,20 @@
         <p:nvPr/>
       </p:nvGrpSpPr>
       <p:grpSpPr/>
-      <p:sp>
-        <p:nvSpPr>
-          <p:cNvPr id="2" name="Rectangle 1"/>
-          <p:cNvSpPr/>
+      <p:pic>
+        <p:nvPicPr>
+          <p:cNvPr id="2" name="Picture 1" descr="image8.png"/>
+          <p:cNvPicPr>
+            <a:picLocks noChangeAspect="1"/>
+          </p:cNvPicPr>
           <p:nvPr/>
-        </p:nvSpPr>
+        </p:nvPicPr>
+        <p:blipFill>
+          <a:blip r:embed="rId2"/>
+          <a:stretch>
+            <a:fillRect/>
+          </a:stretch>
+        </p:blipFill>
         <p:spPr>
           <a:xfrm>
             <a:off x="0" y="0"/>
@@ -7427,180 +6081,8 @@
           <a:prstGeom prst="rect">
             <a:avLst/>
           </a:prstGeom>
-          <a:solidFill>
-            <a:srgbClr val="3A1AC8"/>
-          </a:solidFill>
-          <a:ln>
-            <a:noFill/>
-          </a:ln>
         </p:spPr>
-        <p:style>
-          <a:lnRef idx="1">
-            <a:schemeClr val="accent1"/>
-          </a:lnRef>
-          <a:fillRef idx="3">
-            <a:schemeClr val="accent1"/>
-          </a:fillRef>
-          <a:effectRef idx="2">
-            <a:schemeClr val="accent1"/>
-          </a:effectRef>
-          <a:fontRef idx="minor">
-            <a:schemeClr val="lt1"/>
-          </a:fontRef>
-        </p:style>
-        <p:txBody>
-          <a:bodyPr rtlCol="0" anchor="ctr"/>
-          <a:lstStyle/>
-          <a:p>
-            <a:pPr algn="ctr"/>
-          </a:p>
-        </p:txBody>
-      </p:sp>
-      <p:sp>
-        <p:nvSpPr>
-          <p:cNvPr id="3" name="Rectangle 2"/>
-          <p:cNvSpPr/>
-          <p:nvPr/>
-        </p:nvSpPr>
-        <p:spPr>
-          <a:xfrm>
-            <a:off x="0" y="0"/>
-            <a:ext cx="6094476" cy="6858000"/>
-          </a:xfrm>
-          <a:prstGeom prst="rect">
-            <a:avLst/>
-          </a:prstGeom>
-          <a:solidFill>
-            <a:srgbClr val="5B2DBE"/>
-          </a:solidFill>
-          <a:ln>
-            <a:noFill/>
-          </a:ln>
-        </p:spPr>
-        <p:style>
-          <a:lnRef idx="1">
-            <a:schemeClr val="accent1"/>
-          </a:lnRef>
-          <a:fillRef idx="3">
-            <a:schemeClr val="accent1"/>
-          </a:fillRef>
-          <a:effectRef idx="2">
-            <a:schemeClr val="accent1"/>
-          </a:effectRef>
-          <a:fontRef idx="minor">
-            <a:schemeClr val="lt1"/>
-          </a:fontRef>
-        </p:style>
-        <p:txBody>
-          <a:bodyPr rtlCol="0" anchor="ctr"/>
-          <a:lstStyle/>
-          <a:p>
-            <a:pPr algn="ctr"/>
-          </a:p>
-        </p:txBody>
-      </p:sp>
-      <p:sp>
-        <p:nvSpPr>
-          <p:cNvPr id="4" name="TextBox 3"/>
-          <p:cNvSpPr txBox="1"/>
-          <p:nvPr/>
-        </p:nvSpPr>
-        <p:spPr>
-          <a:xfrm>
-            <a:off x="4114800" y="2560320"/>
-            <a:ext cx="4114800" cy="822960"/>
-          </a:xfrm>
-          <a:prstGeom prst="rect">
-            <a:avLst/>
-          </a:prstGeom>
-          <a:noFill/>
-        </p:spPr>
-        <p:txBody>
-          <a:bodyPr wrap="square">
-            <a:spAutoFit/>
-          </a:bodyPr>
-          <a:lstStyle/>
-          <a:p>
-            <a:pPr algn="ctr"/>
-            <a:r>
-              <a:rPr sz="3800" b="1" i="0">
-                <a:solidFill>
-                  <a:srgbClr val="FFFFFF"/>
-                </a:solidFill>
-              </a:rPr>
-              <a:t>HCLTech</a:t>
-            </a:r>
-          </a:p>
-        </p:txBody>
-      </p:sp>
-      <p:sp>
-        <p:nvSpPr>
-          <p:cNvPr id="5" name="TextBox 4"/>
-          <p:cNvSpPr txBox="1"/>
-          <p:nvPr/>
-        </p:nvSpPr>
-        <p:spPr>
-          <a:xfrm>
-            <a:off x="4114800" y="3337560"/>
-            <a:ext cx="4114800" cy="457200"/>
-          </a:xfrm>
-          <a:prstGeom prst="rect">
-            <a:avLst/>
-          </a:prstGeom>
-          <a:noFill/>
-        </p:spPr>
-        <p:txBody>
-          <a:bodyPr wrap="square">
-            <a:spAutoFit/>
-          </a:bodyPr>
-          <a:lstStyle/>
-          <a:p>
-            <a:pPr algn="ctr"/>
-            <a:r>
-              <a:rPr sz="1400" b="0" i="0">
-                <a:solidFill>
-                  <a:srgbClr val="FFFFFF"/>
-                </a:solidFill>
-              </a:rPr>
-              <a:t>| Supercharging Progress™</a:t>
-            </a:r>
-          </a:p>
-        </p:txBody>
-      </p:sp>
-      <p:sp>
-        <p:nvSpPr>
-          <p:cNvPr id="6" name="TextBox 5"/>
-          <p:cNvSpPr txBox="1"/>
-          <p:nvPr/>
-        </p:nvSpPr>
-        <p:spPr>
-          <a:xfrm>
-            <a:off x="4114800" y="5852160"/>
-            <a:ext cx="4114800" cy="365760"/>
-          </a:xfrm>
-          <a:prstGeom prst="rect">
-            <a:avLst/>
-          </a:prstGeom>
-          <a:noFill/>
-        </p:spPr>
-        <p:txBody>
-          <a:bodyPr wrap="square">
-            <a:spAutoFit/>
-          </a:bodyPr>
-          <a:lstStyle/>
-          <a:p>
-            <a:pPr algn="ctr"/>
-            <a:r>
-              <a:rPr sz="1200" b="0" i="0">
-                <a:solidFill>
-                  <a:srgbClr val="CCCCFF"/>
-                </a:solidFill>
-              </a:rPr>
-              <a:t>hcltech.com</a:t>
-            </a:r>
-          </a:p>
-        </p:txBody>
-      </p:sp>
+      </p:pic>
     </p:spTree>
   </p:cSld>
   <p:clrMapOvr>
